--- a/TSE_Weekly_Chaten_Aug2_8.pptx
+++ b/TSE_Weekly_Chaten_Aug2_8.pptx
@@ -3097,7 +3097,7 @@
         <p:spPr>
           <a:xfrm>
             <a:off x="0" y="0"/>
-            <a:ext cx="12188952" cy="658368"/>
+            <a:ext cx="12188952" cy="548640"/>
           </a:xfrm>
           <a:prstGeom prst="rect">
             <a:avLst/>
@@ -3139,8 +3139,8 @@
         </p:nvSpPr>
         <p:spPr>
           <a:xfrm>
-            <a:off x="274320" y="36576"/>
-            <a:ext cx="6400800" cy="329184"/>
+            <a:off x="256032" y="36576"/>
+            <a:ext cx="8229600" cy="274320"/>
           </a:xfrm>
           <a:prstGeom prst="rect">
             <a:avLst/>
@@ -3161,7 +3161,7 @@
                 </a:solidFill>
                 <a:latin typeface="Arial"/>
               </a:rPr>
-              <a:t>Chaten's Team Weekly Review</a:t>
+              <a:t>Chaten's Team — Weekly Updates</a:t>
             </a:r>
           </a:p>
         </p:txBody>
@@ -3174,8 +3174,8 @@
         </p:nvSpPr>
         <p:spPr>
           <a:xfrm>
-            <a:off x="274320" y="365760"/>
-            <a:ext cx="6858000" cy="237744"/>
+            <a:off x="256032" y="329184"/>
+            <a:ext cx="7315200" cy="182880"/>
           </a:xfrm>
           <a:prstGeom prst="rect">
             <a:avLst/>
@@ -3196,7 +3196,7 @@
                 </a:solidFill>
                 <a:latin typeface="Arial"/>
               </a:rPr>
-              <a:t>Aug 2 – Aug 8, 2026  |  Signature &amp; Premier Support  |  Industry Cloud</a:t>
+              <a:t>2nd August to 8th August  2026</a:t>
             </a:r>
           </a:p>
         </p:txBody>
@@ -3209,8 +3209,8 @@
         </p:nvSpPr>
         <p:spPr>
           <a:xfrm>
-            <a:off x="9144000" y="54864"/>
-            <a:ext cx="2926080" cy="566928"/>
+            <a:off x="8961120" y="64008"/>
+            <a:ext cx="3108960" cy="438912"/>
           </a:xfrm>
           <a:prstGeom prst="rect">
             <a:avLst/>
@@ -3225,15 +3225,14 @@
           <a:p>
             <a:pPr algn="r"/>
             <a:r>
-              <a:rPr sz="950" b="0">
+              <a:rPr sz="900" b="0">
                 <a:solidFill>
                   <a:srgbClr val="FFFFFF"/>
                 </a:solidFill>
                 <a:latin typeface="Arial"/>
               </a:rPr>
               <a:t>Aug 8, 2026
-All Tiers: SIG · Premier · Standard
-P&amp;T: OmniStudio · LifeSci · CPQ · FSC · RCA</a:t>
+SIG · Premier · Standard · Industry Cloud</a:t>
             </a:r>
           </a:p>
         </p:txBody>
@@ -3246,8 +3245,8 @@
         </p:nvSpPr>
         <p:spPr>
           <a:xfrm>
-            <a:off x="0" y="658368"/>
-            <a:ext cx="12188952" cy="256032"/>
+            <a:off x="0" y="548640"/>
+            <a:ext cx="12188952" cy="182880"/>
           </a:xfrm>
           <a:prstGeom prst="rect">
             <a:avLst/>
@@ -3289,8 +3288,8 @@
         </p:nvSpPr>
         <p:spPr>
           <a:xfrm>
-            <a:off x="274320" y="685800"/>
-            <a:ext cx="11640312" cy="219456"/>
+            <a:off x="274320" y="576072"/>
+            <a:ext cx="11640312" cy="137160"/>
           </a:xfrm>
           <a:prstGeom prst="rect">
             <a:avLst/>
@@ -3305,13 +3304,13 @@
           <a:p>
             <a:pPr algn="ctr"/>
             <a:r>
-              <a:rPr sz="1050" b="1">
+              <a:rPr sz="950" b="1">
                 <a:solidFill>
                   <a:srgbClr val="0B5225"/>
                 </a:solidFill>
                 <a:latin typeface="Arial"/>
               </a:rPr>
-              <a:t>⭐  Perfect Week — CSAT 5.0 across ALL tiers (8 surveys)  |  0% Escalations  |  0% SLA Miss  |  119% Overall Productivity  ⭐</a:t>
+              <a:t>⭐  PERFECT WEEK — CSAT 5.0 All Tiers  |  0% Escalations  |  0% SLA Miss  |  119% Overall Productivity  ⭐</a:t>
             </a:r>
           </a:p>
         </p:txBody>
@@ -3324,14 +3323,14 @@
         </p:nvSpPr>
         <p:spPr>
           <a:xfrm>
-            <a:off x="4058412" y="914400"/>
-            <a:ext cx="9144" cy="5715000"/>
+            <a:off x="0" y="731520"/>
+            <a:ext cx="12188952" cy="1261872"/>
           </a:xfrm>
           <a:prstGeom prst="rect">
             <a:avLst/>
           </a:prstGeom>
           <a:solidFill>
-            <a:srgbClr val="E8EAED"/>
+            <a:srgbClr val="F8F9FA"/>
           </a:solidFill>
           <a:ln>
             <a:noFill/>
@@ -3367,94 +3366,8 @@
         </p:nvSpPr>
         <p:spPr>
           <a:xfrm>
-            <a:off x="8121395" y="914400"/>
-            <a:ext cx="9144" cy="5715000"/>
-          </a:xfrm>
-          <a:prstGeom prst="rect">
-            <a:avLst/>
-          </a:prstGeom>
-          <a:solidFill>
-            <a:srgbClr val="E8EAED"/>
-          </a:solidFill>
-          <a:ln>
-            <a:noFill/>
-          </a:ln>
-        </p:spPr>
-        <p:style>
-          <a:lnRef idx="1">
-            <a:schemeClr val="accent1"/>
-          </a:lnRef>
-          <a:fillRef idx="3">
-            <a:schemeClr val="accent1"/>
-          </a:fillRef>
-          <a:effectRef idx="2">
-            <a:schemeClr val="accent1"/>
-          </a:effectRef>
-          <a:fontRef idx="minor">
-            <a:schemeClr val="lt1"/>
-          </a:fontRef>
-        </p:style>
-        <p:txBody>
-          <a:bodyPr rtlCol="0" anchor="ctr"/>
-          <a:lstStyle/>
-          <a:p>
-            <a:pPr algn="ctr"/>
-          </a:p>
-        </p:txBody>
-      </p:sp>
-      <p:sp>
-        <p:nvSpPr>
-          <p:cNvPr id="10" name="Rectangle 9"/>
-          <p:cNvSpPr/>
-          <p:nvPr/>
-        </p:nvSpPr>
-        <p:spPr>
-          <a:xfrm>
-            <a:off x="0" y="3767328"/>
-            <a:ext cx="12188952" cy="9144"/>
-          </a:xfrm>
-          <a:prstGeom prst="rect">
-            <a:avLst/>
-          </a:prstGeom>
-          <a:solidFill>
-            <a:srgbClr val="E8EAED"/>
-          </a:solidFill>
-          <a:ln>
-            <a:noFill/>
-          </a:ln>
-        </p:spPr>
-        <p:style>
-          <a:lnRef idx="1">
-            <a:schemeClr val="accent1"/>
-          </a:lnRef>
-          <a:fillRef idx="3">
-            <a:schemeClr val="accent1"/>
-          </a:fillRef>
-          <a:effectRef idx="2">
-            <a:schemeClr val="accent1"/>
-          </a:effectRef>
-          <a:fontRef idx="minor">
-            <a:schemeClr val="lt1"/>
-          </a:fontRef>
-        </p:style>
-        <p:txBody>
-          <a:bodyPr rtlCol="0" anchor="ctr"/>
-          <a:lstStyle/>
-          <a:p>
-            <a:pPr algn="ctr"/>
-          </a:p>
-        </p:txBody>
-      </p:sp>
-      <p:sp>
-        <p:nvSpPr>
-          <p:cNvPr id="11" name="Rectangle 10"/>
-          <p:cNvSpPr/>
-          <p:nvPr/>
-        </p:nvSpPr>
-        <p:spPr>
-          <a:xfrm>
-            <a:off x="109728" y="987552"/>
-            <a:ext cx="3843528" cy="182880"/>
+            <a:off x="91440" y="768096"/>
+            <a:ext cx="4937759" cy="192024"/>
           </a:xfrm>
           <a:prstGeom prst="rect">
             <a:avLst/>
@@ -3490,14 +3403,14 @@
       </p:sp>
       <p:sp>
         <p:nvSpPr>
-          <p:cNvPr id="12" name="TextBox 11"/>
+          <p:cNvPr id="10" name="TextBox 9"/>
           <p:cNvSpPr txBox="1"/>
           <p:nvPr/>
         </p:nvSpPr>
         <p:spPr>
           <a:xfrm>
-            <a:off x="137160" y="987552"/>
-            <a:ext cx="3788664" cy="182880"/>
+            <a:off x="164592" y="786384"/>
+            <a:ext cx="4846320" cy="164592"/>
           </a:xfrm>
           <a:prstGeom prst="rect">
             <a:avLst/>
@@ -3512,27 +3425,27 @@
           <a:p>
             <a:pPr algn="l"/>
             <a:r>
-              <a:rPr sz="800" b="1">
+              <a:rPr sz="750" b="1">
                 <a:solidFill>
                   <a:srgbClr val="137333"/>
                 </a:solidFill>
                 <a:latin typeface="Arial"/>
               </a:rPr>
-              <a:t>CSAT (SURVEY COUNT)</a:t>
-            </a:r>
-          </a:p>
-        </p:txBody>
-      </p:sp>
-      <p:sp>
-        <p:nvSpPr>
-          <p:cNvPr id="13" name="Rectangle 12"/>
+              <a:t>CSAT  (SURVEY COUNT)</a:t>
+            </a:r>
+          </a:p>
+        </p:txBody>
+      </p:sp>
+      <p:sp>
+        <p:nvSpPr>
+          <p:cNvPr id="11" name="Rectangle 10"/>
           <p:cNvSpPr/>
           <p:nvPr/>
         </p:nvSpPr>
         <p:spPr>
           <a:xfrm>
-            <a:off x="182880" y="1207008"/>
-            <a:ext cx="869441" cy="2473452"/>
+            <a:off x="109728" y="969264"/>
+            <a:ext cx="1170431" cy="1005839"/>
           </a:xfrm>
           <a:prstGeom prst="rect">
             <a:avLst/>
@@ -3542,7 +3455,7 @@
           </a:solidFill>
           <a:ln w="3810">
             <a:solidFill>
-              <a:srgbClr val="C8B400"/>
+              <a:srgbClr val="C8A000"/>
             </a:solidFill>
           </a:ln>
         </p:spPr>
@@ -3570,14 +3483,14 @@
       </p:sp>
       <p:sp>
         <p:nvSpPr>
-          <p:cNvPr id="14" name="TextBox 13"/>
+          <p:cNvPr id="12" name="TextBox 11"/>
           <p:cNvSpPr txBox="1"/>
           <p:nvPr/>
         </p:nvSpPr>
         <p:spPr>
           <a:xfrm>
-            <a:off x="182880" y="1252728"/>
-            <a:ext cx="869441" cy="292608"/>
+            <a:off x="128015" y="1005840"/>
+            <a:ext cx="1133855" cy="502919"/>
           </a:xfrm>
           <a:prstGeom prst="rect">
             <a:avLst/>
@@ -3592,7 +3505,7 @@
           <a:p>
             <a:pPr algn="ctr"/>
             <a:r>
-              <a:rPr sz="2200" b="1">
+              <a:rPr sz="1700" b="1">
                 <a:solidFill>
                   <a:srgbClr val="7B5800"/>
                 </a:solidFill>
@@ -3605,14 +3518,14 @@
       </p:sp>
       <p:sp>
         <p:nvSpPr>
-          <p:cNvPr id="15" name="TextBox 14"/>
+          <p:cNvPr id="13" name="TextBox 12"/>
           <p:cNvSpPr txBox="1"/>
           <p:nvPr/>
         </p:nvSpPr>
         <p:spPr>
           <a:xfrm>
-            <a:off x="182880" y="1527048"/>
-            <a:ext cx="869441" cy="164592"/>
+            <a:off x="128015" y="1492300"/>
+            <a:ext cx="1133855" cy="261518"/>
           </a:xfrm>
           <a:prstGeom prst="rect">
             <a:avLst/>
@@ -3627,9 +3540,9 @@
           <a:p>
             <a:pPr algn="ctr"/>
             <a:r>
-              <a:rPr sz="900" b="1">
-                <a:solidFill>
-                  <a:srgbClr val="3C4043"/>
+              <a:rPr sz="750" b="0">
+                <a:solidFill>
+                  <a:srgbClr val="5F6368"/>
                 </a:solidFill>
                 <a:latin typeface="Arial"/>
               </a:rPr>
@@ -3640,14 +3553,14 @@
       </p:sp>
       <p:sp>
         <p:nvSpPr>
-          <p:cNvPr id="16" name="TextBox 15"/>
+          <p:cNvPr id="14" name="TextBox 13"/>
           <p:cNvSpPr txBox="1"/>
           <p:nvPr/>
         </p:nvSpPr>
         <p:spPr>
           <a:xfrm>
-            <a:off x="182880" y="1682496"/>
-            <a:ext cx="869441" cy="146304"/>
+            <a:off x="128015" y="1733702"/>
+            <a:ext cx="1133855" cy="221284"/>
           </a:xfrm>
           <a:prstGeom prst="rect">
             <a:avLst/>
@@ -3662,7 +3575,7 @@
           <a:p>
             <a:pPr algn="ctr"/>
             <a:r>
-              <a:rPr sz="800" b="0">
+              <a:rPr sz="700" b="0">
                 <a:solidFill>
                   <a:srgbClr val="5F6368"/>
                 </a:solidFill>
@@ -3675,14 +3588,14 @@
       </p:sp>
       <p:sp>
         <p:nvSpPr>
-          <p:cNvPr id="17" name="Rectangle 16"/>
+          <p:cNvPr id="15" name="Rectangle 14"/>
           <p:cNvSpPr/>
           <p:nvPr/>
         </p:nvSpPr>
         <p:spPr>
           <a:xfrm>
-            <a:off x="1107186" y="1207008"/>
-            <a:ext cx="869441" cy="2473452"/>
+            <a:off x="1335024" y="969264"/>
+            <a:ext cx="1170431" cy="1005839"/>
           </a:xfrm>
           <a:prstGeom prst="rect">
             <a:avLst/>
@@ -3692,7 +3605,7 @@
           </a:solidFill>
           <a:ln w="3810">
             <a:solidFill>
-              <a:srgbClr val="C8B400"/>
+              <a:srgbClr val="C8A000"/>
             </a:solidFill>
           </a:ln>
         </p:spPr>
@@ -3720,14 +3633,14 @@
       </p:sp>
       <p:sp>
         <p:nvSpPr>
-          <p:cNvPr id="18" name="TextBox 17"/>
+          <p:cNvPr id="16" name="TextBox 15"/>
           <p:cNvSpPr txBox="1"/>
           <p:nvPr/>
         </p:nvSpPr>
         <p:spPr>
           <a:xfrm>
-            <a:off x="1107186" y="1252728"/>
-            <a:ext cx="869441" cy="292608"/>
+            <a:off x="1353312" y="1005840"/>
+            <a:ext cx="1133855" cy="502919"/>
           </a:xfrm>
           <a:prstGeom prst="rect">
             <a:avLst/>
@@ -3742,7 +3655,7 @@
           <a:p>
             <a:pPr algn="ctr"/>
             <a:r>
-              <a:rPr sz="2200" b="1">
+              <a:rPr sz="1700" b="1">
                 <a:solidFill>
                   <a:srgbClr val="7B5800"/>
                 </a:solidFill>
@@ -3755,14 +3668,14 @@
       </p:sp>
       <p:sp>
         <p:nvSpPr>
-          <p:cNvPr id="19" name="TextBox 18"/>
+          <p:cNvPr id="17" name="TextBox 16"/>
           <p:cNvSpPr txBox="1"/>
           <p:nvPr/>
         </p:nvSpPr>
         <p:spPr>
           <a:xfrm>
-            <a:off x="1107186" y="1527048"/>
-            <a:ext cx="869441" cy="164592"/>
+            <a:off x="1353312" y="1492300"/>
+            <a:ext cx="1133855" cy="261518"/>
           </a:xfrm>
           <a:prstGeom prst="rect">
             <a:avLst/>
@@ -3777,9 +3690,9 @@
           <a:p>
             <a:pPr algn="ctr"/>
             <a:r>
-              <a:rPr sz="900" b="1">
-                <a:solidFill>
-                  <a:srgbClr val="3C4043"/>
+              <a:rPr sz="750" b="0">
+                <a:solidFill>
+                  <a:srgbClr val="5F6368"/>
                 </a:solidFill>
                 <a:latin typeface="Arial"/>
               </a:rPr>
@@ -3790,14 +3703,14 @@
       </p:sp>
       <p:sp>
         <p:nvSpPr>
-          <p:cNvPr id="20" name="TextBox 19"/>
+          <p:cNvPr id="18" name="TextBox 17"/>
           <p:cNvSpPr txBox="1"/>
           <p:nvPr/>
         </p:nvSpPr>
         <p:spPr>
           <a:xfrm>
-            <a:off x="1107186" y="1682496"/>
-            <a:ext cx="869441" cy="146304"/>
+            <a:off x="1353312" y="1733702"/>
+            <a:ext cx="1133855" cy="221284"/>
           </a:xfrm>
           <a:prstGeom prst="rect">
             <a:avLst/>
@@ -3812,7 +3725,7 @@
           <a:p>
             <a:pPr algn="ctr"/>
             <a:r>
-              <a:rPr sz="800" b="0">
+              <a:rPr sz="700" b="0">
                 <a:solidFill>
                   <a:srgbClr val="5F6368"/>
                 </a:solidFill>
@@ -3825,14 +3738,14 @@
       </p:sp>
       <p:sp>
         <p:nvSpPr>
-          <p:cNvPr id="21" name="Rectangle 20"/>
+          <p:cNvPr id="19" name="Rectangle 18"/>
           <p:cNvSpPr/>
           <p:nvPr/>
         </p:nvSpPr>
         <p:spPr>
           <a:xfrm>
-            <a:off x="2031492" y="1207008"/>
-            <a:ext cx="869441" cy="2473452"/>
+            <a:off x="2560320" y="969264"/>
+            <a:ext cx="1170431" cy="1005839"/>
           </a:xfrm>
           <a:prstGeom prst="rect">
             <a:avLst/>
@@ -3842,7 +3755,7 @@
           </a:solidFill>
           <a:ln w="3810">
             <a:solidFill>
-              <a:srgbClr val="C8B400"/>
+              <a:srgbClr val="C8A000"/>
             </a:solidFill>
           </a:ln>
         </p:spPr>
@@ -3870,14 +3783,14 @@
       </p:sp>
       <p:sp>
         <p:nvSpPr>
-          <p:cNvPr id="22" name="TextBox 21"/>
+          <p:cNvPr id="20" name="TextBox 19"/>
           <p:cNvSpPr txBox="1"/>
           <p:nvPr/>
         </p:nvSpPr>
         <p:spPr>
           <a:xfrm>
-            <a:off x="2031492" y="1252728"/>
-            <a:ext cx="869441" cy="292608"/>
+            <a:off x="2578608" y="1005840"/>
+            <a:ext cx="1133855" cy="502919"/>
           </a:xfrm>
           <a:prstGeom prst="rect">
             <a:avLst/>
@@ -3892,7 +3805,7 @@
           <a:p>
             <a:pPr algn="ctr"/>
             <a:r>
-              <a:rPr sz="2200" b="1">
+              <a:rPr sz="1700" b="1">
                 <a:solidFill>
                   <a:srgbClr val="7B5800"/>
                 </a:solidFill>
@@ -3905,14 +3818,14 @@
       </p:sp>
       <p:sp>
         <p:nvSpPr>
-          <p:cNvPr id="23" name="TextBox 22"/>
+          <p:cNvPr id="21" name="TextBox 20"/>
           <p:cNvSpPr txBox="1"/>
           <p:nvPr/>
         </p:nvSpPr>
         <p:spPr>
           <a:xfrm>
-            <a:off x="2031492" y="1527048"/>
-            <a:ext cx="869441" cy="164592"/>
+            <a:off x="2578608" y="1492300"/>
+            <a:ext cx="1133855" cy="261518"/>
           </a:xfrm>
           <a:prstGeom prst="rect">
             <a:avLst/>
@@ -3927,9 +3840,9 @@
           <a:p>
             <a:pPr algn="ctr"/>
             <a:r>
-              <a:rPr sz="900" b="1">
-                <a:solidFill>
-                  <a:srgbClr val="3C4043"/>
+              <a:rPr sz="750" b="0">
+                <a:solidFill>
+                  <a:srgbClr val="5F6368"/>
                 </a:solidFill>
                 <a:latin typeface="Arial"/>
               </a:rPr>
@@ -3940,14 +3853,14 @@
       </p:sp>
       <p:sp>
         <p:nvSpPr>
-          <p:cNvPr id="24" name="TextBox 23"/>
+          <p:cNvPr id="22" name="TextBox 21"/>
           <p:cNvSpPr txBox="1"/>
           <p:nvPr/>
         </p:nvSpPr>
         <p:spPr>
           <a:xfrm>
-            <a:off x="2031492" y="1682496"/>
-            <a:ext cx="869441" cy="146304"/>
+            <a:off x="2578608" y="1733702"/>
+            <a:ext cx="1133855" cy="221284"/>
           </a:xfrm>
           <a:prstGeom prst="rect">
             <a:avLst/>
@@ -3962,7 +3875,7 @@
           <a:p>
             <a:pPr algn="ctr"/>
             <a:r>
-              <a:rPr sz="800" b="0">
+              <a:rPr sz="700" b="0">
                 <a:solidFill>
                   <a:srgbClr val="5F6368"/>
                 </a:solidFill>
@@ -3975,14 +3888,14 @@
       </p:sp>
       <p:sp>
         <p:nvSpPr>
-          <p:cNvPr id="25" name="Rectangle 24"/>
+          <p:cNvPr id="23" name="Rectangle 22"/>
           <p:cNvSpPr/>
           <p:nvPr/>
         </p:nvSpPr>
         <p:spPr>
           <a:xfrm>
-            <a:off x="2955798" y="1207008"/>
-            <a:ext cx="869441" cy="2473452"/>
+            <a:off x="3785615" y="969264"/>
+            <a:ext cx="1170431" cy="1005839"/>
           </a:xfrm>
           <a:prstGeom prst="rect">
             <a:avLst/>
@@ -3992,7 +3905,7 @@
           </a:solidFill>
           <a:ln w="3810">
             <a:solidFill>
-              <a:srgbClr val="C8B400"/>
+              <a:srgbClr val="C8A000"/>
             </a:solidFill>
           </a:ln>
         </p:spPr>
@@ -4020,14 +3933,14 @@
       </p:sp>
       <p:sp>
         <p:nvSpPr>
-          <p:cNvPr id="26" name="TextBox 25"/>
+          <p:cNvPr id="24" name="TextBox 23"/>
           <p:cNvSpPr txBox="1"/>
           <p:nvPr/>
         </p:nvSpPr>
         <p:spPr>
           <a:xfrm>
-            <a:off x="2955798" y="1252728"/>
-            <a:ext cx="869441" cy="292608"/>
+            <a:off x="3803903" y="1005840"/>
+            <a:ext cx="1133855" cy="502919"/>
           </a:xfrm>
           <a:prstGeom prst="rect">
             <a:avLst/>
@@ -4042,7 +3955,7 @@
           <a:p>
             <a:pPr algn="ctr"/>
             <a:r>
-              <a:rPr sz="2200" b="1">
+              <a:rPr sz="1700" b="1">
                 <a:solidFill>
                   <a:srgbClr val="7B5800"/>
                 </a:solidFill>
@@ -4055,14 +3968,14 @@
       </p:sp>
       <p:sp>
         <p:nvSpPr>
-          <p:cNvPr id="27" name="TextBox 26"/>
+          <p:cNvPr id="25" name="TextBox 24"/>
           <p:cNvSpPr txBox="1"/>
           <p:nvPr/>
         </p:nvSpPr>
         <p:spPr>
           <a:xfrm>
-            <a:off x="2955798" y="1527048"/>
-            <a:ext cx="869441" cy="164592"/>
+            <a:off x="3803903" y="1492300"/>
+            <a:ext cx="1133855" cy="261518"/>
           </a:xfrm>
           <a:prstGeom prst="rect">
             <a:avLst/>
@@ -4077,9 +3990,9 @@
           <a:p>
             <a:pPr algn="ctr"/>
             <a:r>
-              <a:rPr sz="900" b="1">
-                <a:solidFill>
-                  <a:srgbClr val="3C4043"/>
+              <a:rPr sz="750" b="0">
+                <a:solidFill>
+                  <a:srgbClr val="5F6368"/>
                 </a:solidFill>
                 <a:latin typeface="Arial"/>
               </a:rPr>
@@ -4090,14 +4003,14 @@
       </p:sp>
       <p:sp>
         <p:nvSpPr>
-          <p:cNvPr id="28" name="TextBox 27"/>
+          <p:cNvPr id="26" name="TextBox 25"/>
           <p:cNvSpPr txBox="1"/>
           <p:nvPr/>
         </p:nvSpPr>
         <p:spPr>
           <a:xfrm>
-            <a:off x="2955798" y="1682496"/>
-            <a:ext cx="869441" cy="146304"/>
+            <a:off x="3803903" y="1733702"/>
+            <a:ext cx="1133855" cy="221284"/>
           </a:xfrm>
           <a:prstGeom prst="rect">
             <a:avLst/>
@@ -4112,7 +4025,7 @@
           <a:p>
             <a:pPr algn="ctr"/>
             <a:r>
-              <a:rPr sz="800" b="0">
+              <a:rPr sz="700" b="0">
                 <a:solidFill>
                   <a:srgbClr val="5F6368"/>
                 </a:solidFill>
@@ -4125,14 +4038,57 @@
       </p:sp>
       <p:sp>
         <p:nvSpPr>
-          <p:cNvPr id="29" name="Rectangle 28"/>
+          <p:cNvPr id="27" name="Rectangle 26"/>
           <p:cNvSpPr/>
           <p:nvPr/>
         </p:nvSpPr>
         <p:spPr>
           <a:xfrm>
-            <a:off x="4172712" y="987552"/>
-            <a:ext cx="3843528" cy="182880"/>
+            <a:off x="5120640" y="777240"/>
+            <a:ext cx="7315" cy="1170431"/>
+          </a:xfrm>
+          <a:prstGeom prst="rect">
+            <a:avLst/>
+          </a:prstGeom>
+          <a:solidFill>
+            <a:srgbClr val="DADCE0"/>
+          </a:solidFill>
+          <a:ln>
+            <a:noFill/>
+          </a:ln>
+        </p:spPr>
+        <p:style>
+          <a:lnRef idx="1">
+            <a:schemeClr val="accent1"/>
+          </a:lnRef>
+          <a:fillRef idx="3">
+            <a:schemeClr val="accent1"/>
+          </a:fillRef>
+          <a:effectRef idx="2">
+            <a:schemeClr val="accent1"/>
+          </a:effectRef>
+          <a:fontRef idx="minor">
+            <a:schemeClr val="lt1"/>
+          </a:fontRef>
+        </p:style>
+        <p:txBody>
+          <a:bodyPr rtlCol="0" anchor="ctr"/>
+          <a:lstStyle/>
+          <a:p>
+            <a:pPr algn="ctr"/>
+          </a:p>
+        </p:txBody>
+      </p:sp>
+      <p:sp>
+        <p:nvSpPr>
+          <p:cNvPr id="28" name="Rectangle 27"/>
+          <p:cNvSpPr/>
+          <p:nvPr/>
+        </p:nvSpPr>
+        <p:spPr>
+          <a:xfrm>
+            <a:off x="5212079" y="768096"/>
+            <a:ext cx="3474720" cy="192024"/>
           </a:xfrm>
           <a:prstGeom prst="rect">
             <a:avLst/>
@@ -4168,14 +4124,14 @@
       </p:sp>
       <p:sp>
         <p:nvSpPr>
-          <p:cNvPr id="30" name="TextBox 29"/>
+          <p:cNvPr id="29" name="TextBox 28"/>
           <p:cNvSpPr txBox="1"/>
           <p:nvPr/>
         </p:nvSpPr>
         <p:spPr>
           <a:xfrm>
-            <a:off x="4200144" y="987552"/>
-            <a:ext cx="3788664" cy="182880"/>
+            <a:off x="5285231" y="786384"/>
+            <a:ext cx="3383279" cy="164592"/>
           </a:xfrm>
           <a:prstGeom prst="rect">
             <a:avLst/>
@@ -4190,27 +4146,27 @@
           <a:p>
             <a:pPr algn="l"/>
             <a:r>
-              <a:rPr sz="800" b="1">
+              <a:rPr sz="750" b="1">
                 <a:solidFill>
                   <a:srgbClr val="137333"/>
                 </a:solidFill>
                 <a:latin typeface="Arial"/>
               </a:rPr>
-              <a:t>VOLUME, TTR &amp; PRODUCTIVITY</a:t>
-            </a:r>
-          </a:p>
-        </p:txBody>
-      </p:sp>
-      <p:sp>
-        <p:nvSpPr>
-          <p:cNvPr id="31" name="Rectangle 30"/>
+              <a:t>VOLUME &amp; SLA</a:t>
+            </a:r>
+          </a:p>
+        </p:txBody>
+      </p:sp>
+      <p:sp>
+        <p:nvSpPr>
+          <p:cNvPr id="30" name="Rectangle 29"/>
           <p:cNvSpPr/>
           <p:nvPr/>
         </p:nvSpPr>
         <p:spPr>
           <a:xfrm>
-            <a:off x="4227576" y="1207008"/>
-            <a:ext cx="880872" cy="457200"/>
+            <a:off x="5212079" y="969264"/>
+            <a:ext cx="654710" cy="1005839"/>
           </a:xfrm>
           <a:prstGeom prst="rect">
             <a:avLst/>
@@ -4246,14 +4202,14 @@
       </p:sp>
       <p:sp>
         <p:nvSpPr>
-          <p:cNvPr id="32" name="TextBox 31"/>
+          <p:cNvPr id="31" name="TextBox 30"/>
           <p:cNvSpPr txBox="1"/>
           <p:nvPr/>
         </p:nvSpPr>
         <p:spPr>
           <a:xfrm>
-            <a:off x="4227576" y="1234440"/>
-            <a:ext cx="880872" cy="256032"/>
+            <a:off x="5230367" y="1005840"/>
+            <a:ext cx="618134" cy="502919"/>
           </a:xfrm>
           <a:prstGeom prst="rect">
             <a:avLst/>
@@ -4281,14 +4237,14 @@
       </p:sp>
       <p:sp>
         <p:nvSpPr>
-          <p:cNvPr id="33" name="TextBox 32"/>
+          <p:cNvPr id="32" name="TextBox 31"/>
           <p:cNvSpPr txBox="1"/>
           <p:nvPr/>
         </p:nvSpPr>
         <p:spPr>
           <a:xfrm>
-            <a:off x="4227576" y="1481328"/>
-            <a:ext cx="880872" cy="164592"/>
+            <a:off x="5230367" y="1492300"/>
+            <a:ext cx="618134" cy="261518"/>
           </a:xfrm>
           <a:prstGeom prst="rect">
             <a:avLst/>
@@ -4303,7 +4259,7 @@
           <a:p>
             <a:pPr algn="ctr"/>
             <a:r>
-              <a:rPr sz="800" b="0">
+              <a:rPr sz="750" b="0">
                 <a:solidFill>
                   <a:srgbClr val="5F6368"/>
                 </a:solidFill>
@@ -4316,14 +4272,14 @@
       </p:sp>
       <p:sp>
         <p:nvSpPr>
-          <p:cNvPr id="34" name="Rectangle 33"/>
+          <p:cNvPr id="33" name="Rectangle 32"/>
           <p:cNvSpPr/>
           <p:nvPr/>
         </p:nvSpPr>
         <p:spPr>
           <a:xfrm>
-            <a:off x="5163312" y="1207008"/>
-            <a:ext cx="880872" cy="457200"/>
+            <a:off x="5903366" y="969264"/>
+            <a:ext cx="654710" cy="1005839"/>
           </a:xfrm>
           <a:prstGeom prst="rect">
             <a:avLst/>
@@ -4359,14 +4315,14 @@
       </p:sp>
       <p:sp>
         <p:nvSpPr>
-          <p:cNvPr id="35" name="TextBox 34"/>
+          <p:cNvPr id="34" name="TextBox 33"/>
           <p:cNvSpPr txBox="1"/>
           <p:nvPr/>
         </p:nvSpPr>
         <p:spPr>
           <a:xfrm>
-            <a:off x="5163312" y="1234440"/>
-            <a:ext cx="880872" cy="256032"/>
+            <a:off x="5921654" y="1005840"/>
+            <a:ext cx="618134" cy="502919"/>
           </a:xfrm>
           <a:prstGeom prst="rect">
             <a:avLst/>
@@ -4387,21 +4343,21 @@
                 </a:solidFill>
                 <a:latin typeface="Arial"/>
               </a:rPr>
-              <a:t>88</a:t>
-            </a:r>
-          </a:p>
-        </p:txBody>
-      </p:sp>
-      <p:sp>
-        <p:nvSpPr>
-          <p:cNvPr id="36" name="TextBox 35"/>
+              <a:t>76</a:t>
+            </a:r>
+          </a:p>
+        </p:txBody>
+      </p:sp>
+      <p:sp>
+        <p:nvSpPr>
+          <p:cNvPr id="35" name="TextBox 34"/>
           <p:cNvSpPr txBox="1"/>
           <p:nvPr/>
         </p:nvSpPr>
         <p:spPr>
           <a:xfrm>
-            <a:off x="5163312" y="1481328"/>
-            <a:ext cx="880872" cy="164592"/>
+            <a:off x="5921654" y="1492300"/>
+            <a:ext cx="618134" cy="261518"/>
           </a:xfrm>
           <a:prstGeom prst="rect">
             <a:avLst/>
@@ -4416,7 +4372,7 @@
           <a:p>
             <a:pPr algn="ctr"/>
             <a:r>
-              <a:rPr sz="800" b="0">
+              <a:rPr sz="750" b="0">
                 <a:solidFill>
                   <a:srgbClr val="5F6368"/>
                 </a:solidFill>
@@ -4429,14 +4385,14 @@
       </p:sp>
       <p:sp>
         <p:nvSpPr>
-          <p:cNvPr id="37" name="Rectangle 36"/>
+          <p:cNvPr id="36" name="Rectangle 35"/>
           <p:cNvSpPr/>
           <p:nvPr/>
         </p:nvSpPr>
         <p:spPr>
           <a:xfrm>
-            <a:off x="6099048" y="1207008"/>
-            <a:ext cx="880872" cy="457200"/>
+            <a:off x="6594652" y="969264"/>
+            <a:ext cx="654710" cy="1005839"/>
           </a:xfrm>
           <a:prstGeom prst="rect">
             <a:avLst/>
@@ -4472,14 +4428,14 @@
       </p:sp>
       <p:sp>
         <p:nvSpPr>
-          <p:cNvPr id="38" name="TextBox 37"/>
+          <p:cNvPr id="37" name="TextBox 36"/>
           <p:cNvSpPr txBox="1"/>
           <p:nvPr/>
         </p:nvSpPr>
         <p:spPr>
           <a:xfrm>
-            <a:off x="6099048" y="1234440"/>
-            <a:ext cx="880872" cy="256032"/>
+            <a:off x="6612940" y="1005840"/>
+            <a:ext cx="618134" cy="502919"/>
           </a:xfrm>
           <a:prstGeom prst="rect">
             <a:avLst/>
@@ -4507,14 +4463,14 @@
       </p:sp>
       <p:sp>
         <p:nvSpPr>
-          <p:cNvPr id="39" name="TextBox 38"/>
+          <p:cNvPr id="38" name="TextBox 37"/>
           <p:cNvSpPr txBox="1"/>
           <p:nvPr/>
         </p:nvSpPr>
         <p:spPr>
           <a:xfrm>
-            <a:off x="6099048" y="1481328"/>
-            <a:ext cx="880872" cy="164592"/>
+            <a:off x="6612940" y="1492300"/>
+            <a:ext cx="618134" cy="261518"/>
           </a:xfrm>
           <a:prstGeom prst="rect">
             <a:avLst/>
@@ -4529,7 +4485,7 @@
           <a:p>
             <a:pPr algn="ctr"/>
             <a:r>
-              <a:rPr sz="800" b="0">
+              <a:rPr sz="750" b="0">
                 <a:solidFill>
                   <a:srgbClr val="5F6368"/>
                 </a:solidFill>
@@ -4542,14 +4498,361 @@
       </p:sp>
       <p:sp>
         <p:nvSpPr>
-          <p:cNvPr id="40" name="Rectangle 39"/>
+          <p:cNvPr id="39" name="Rectangle 38"/>
           <p:cNvSpPr/>
           <p:nvPr/>
         </p:nvSpPr>
         <p:spPr>
           <a:xfrm>
-            <a:off x="7034784" y="1207008"/>
-            <a:ext cx="880872" cy="457200"/>
+            <a:off x="7285939" y="969264"/>
+            <a:ext cx="654710" cy="1005839"/>
+          </a:xfrm>
+          <a:prstGeom prst="rect">
+            <a:avLst/>
+          </a:prstGeom>
+          <a:solidFill>
+            <a:srgbClr val="E6F4EA"/>
+          </a:solidFill>
+          <a:ln>
+            <a:noFill/>
+          </a:ln>
+        </p:spPr>
+        <p:style>
+          <a:lnRef idx="1">
+            <a:schemeClr val="accent1"/>
+          </a:lnRef>
+          <a:fillRef idx="3">
+            <a:schemeClr val="accent1"/>
+          </a:fillRef>
+          <a:effectRef idx="2">
+            <a:schemeClr val="accent1"/>
+          </a:effectRef>
+          <a:fontRef idx="minor">
+            <a:schemeClr val="lt1"/>
+          </a:fontRef>
+        </p:style>
+        <p:txBody>
+          <a:bodyPr rtlCol="0" anchor="ctr"/>
+          <a:lstStyle/>
+          <a:p>
+            <a:pPr algn="ctr"/>
+          </a:p>
+        </p:txBody>
+      </p:sp>
+      <p:sp>
+        <p:nvSpPr>
+          <p:cNvPr id="40" name="TextBox 39"/>
+          <p:cNvSpPr txBox="1"/>
+          <p:nvPr/>
+        </p:nvSpPr>
+        <p:spPr>
+          <a:xfrm>
+            <a:off x="7304227" y="1005840"/>
+            <a:ext cx="618134" cy="502919"/>
+          </a:xfrm>
+          <a:prstGeom prst="rect">
+            <a:avLst/>
+          </a:prstGeom>
+          <a:noFill/>
+        </p:spPr>
+        <p:txBody>
+          <a:bodyPr wrap="square">
+            <a:spAutoFit/>
+          </a:bodyPr>
+          <a:lstStyle/>
+          <a:p>
+            <a:pPr algn="ctr"/>
+            <a:r>
+              <a:rPr sz="1700" b="1">
+                <a:solidFill>
+                  <a:srgbClr val="137333"/>
+                </a:solidFill>
+                <a:latin typeface="Arial"/>
+              </a:rPr>
+              <a:t>0%</a:t>
+            </a:r>
+          </a:p>
+        </p:txBody>
+      </p:sp>
+      <p:sp>
+        <p:nvSpPr>
+          <p:cNvPr id="41" name="TextBox 40"/>
+          <p:cNvSpPr txBox="1"/>
+          <p:nvPr/>
+        </p:nvSpPr>
+        <p:spPr>
+          <a:xfrm>
+            <a:off x="7304227" y="1492300"/>
+            <a:ext cx="618134" cy="261518"/>
+          </a:xfrm>
+          <a:prstGeom prst="rect">
+            <a:avLst/>
+          </a:prstGeom>
+          <a:noFill/>
+        </p:spPr>
+        <p:txBody>
+          <a:bodyPr wrap="square">
+            <a:spAutoFit/>
+          </a:bodyPr>
+          <a:lstStyle/>
+          <a:p>
+            <a:pPr algn="ctr"/>
+            <a:r>
+              <a:rPr sz="750" b="0">
+                <a:solidFill>
+                  <a:srgbClr val="5F6368"/>
+                </a:solidFill>
+                <a:latin typeface="Arial"/>
+              </a:rPr>
+              <a:t>Esc</a:t>
+            </a:r>
+          </a:p>
+        </p:txBody>
+      </p:sp>
+      <p:sp>
+        <p:nvSpPr>
+          <p:cNvPr id="42" name="Rectangle 41"/>
+          <p:cNvSpPr/>
+          <p:nvPr/>
+        </p:nvSpPr>
+        <p:spPr>
+          <a:xfrm>
+            <a:off x="7977225" y="969264"/>
+            <a:ext cx="654710" cy="1005839"/>
+          </a:xfrm>
+          <a:prstGeom prst="rect">
+            <a:avLst/>
+          </a:prstGeom>
+          <a:solidFill>
+            <a:srgbClr val="E6F4EA"/>
+          </a:solidFill>
+          <a:ln>
+            <a:noFill/>
+          </a:ln>
+        </p:spPr>
+        <p:style>
+          <a:lnRef idx="1">
+            <a:schemeClr val="accent1"/>
+          </a:lnRef>
+          <a:fillRef idx="3">
+            <a:schemeClr val="accent1"/>
+          </a:fillRef>
+          <a:effectRef idx="2">
+            <a:schemeClr val="accent1"/>
+          </a:effectRef>
+          <a:fontRef idx="minor">
+            <a:schemeClr val="lt1"/>
+          </a:fontRef>
+        </p:style>
+        <p:txBody>
+          <a:bodyPr rtlCol="0" anchor="ctr"/>
+          <a:lstStyle/>
+          <a:p>
+            <a:pPr algn="ctr"/>
+          </a:p>
+        </p:txBody>
+      </p:sp>
+      <p:sp>
+        <p:nvSpPr>
+          <p:cNvPr id="43" name="TextBox 42"/>
+          <p:cNvSpPr txBox="1"/>
+          <p:nvPr/>
+        </p:nvSpPr>
+        <p:spPr>
+          <a:xfrm>
+            <a:off x="7995513" y="1005840"/>
+            <a:ext cx="618134" cy="502919"/>
+          </a:xfrm>
+          <a:prstGeom prst="rect">
+            <a:avLst/>
+          </a:prstGeom>
+          <a:noFill/>
+        </p:spPr>
+        <p:txBody>
+          <a:bodyPr wrap="square">
+            <a:spAutoFit/>
+          </a:bodyPr>
+          <a:lstStyle/>
+          <a:p>
+            <a:pPr algn="ctr"/>
+            <a:r>
+              <a:rPr sz="1700" b="1">
+                <a:solidFill>
+                  <a:srgbClr val="137333"/>
+                </a:solidFill>
+                <a:latin typeface="Arial"/>
+              </a:rPr>
+              <a:t>0%</a:t>
+            </a:r>
+          </a:p>
+        </p:txBody>
+      </p:sp>
+      <p:sp>
+        <p:nvSpPr>
+          <p:cNvPr id="44" name="TextBox 43"/>
+          <p:cNvSpPr txBox="1"/>
+          <p:nvPr/>
+        </p:nvSpPr>
+        <p:spPr>
+          <a:xfrm>
+            <a:off x="7995513" y="1492300"/>
+            <a:ext cx="618134" cy="261518"/>
+          </a:xfrm>
+          <a:prstGeom prst="rect">
+            <a:avLst/>
+          </a:prstGeom>
+          <a:noFill/>
+        </p:spPr>
+        <p:txBody>
+          <a:bodyPr wrap="square">
+            <a:spAutoFit/>
+          </a:bodyPr>
+          <a:lstStyle/>
+          <a:p>
+            <a:pPr algn="ctr"/>
+            <a:r>
+              <a:rPr sz="750" b="0">
+                <a:solidFill>
+                  <a:srgbClr val="5F6368"/>
+                </a:solidFill>
+                <a:latin typeface="Arial"/>
+              </a:rPr>
+              <a:t>SLA Miss</a:t>
+            </a:r>
+          </a:p>
+        </p:txBody>
+      </p:sp>
+      <p:sp>
+        <p:nvSpPr>
+          <p:cNvPr id="45" name="Rectangle 44"/>
+          <p:cNvSpPr/>
+          <p:nvPr/>
+        </p:nvSpPr>
+        <p:spPr>
+          <a:xfrm>
+            <a:off x="8778240" y="777240"/>
+            <a:ext cx="7315" cy="1170431"/>
+          </a:xfrm>
+          <a:prstGeom prst="rect">
+            <a:avLst/>
+          </a:prstGeom>
+          <a:solidFill>
+            <a:srgbClr val="DADCE0"/>
+          </a:solidFill>
+          <a:ln>
+            <a:noFill/>
+          </a:ln>
+        </p:spPr>
+        <p:style>
+          <a:lnRef idx="1">
+            <a:schemeClr val="accent1"/>
+          </a:lnRef>
+          <a:fillRef idx="3">
+            <a:schemeClr val="accent1"/>
+          </a:fillRef>
+          <a:effectRef idx="2">
+            <a:schemeClr val="accent1"/>
+          </a:effectRef>
+          <a:fontRef idx="minor">
+            <a:schemeClr val="lt1"/>
+          </a:fontRef>
+        </p:style>
+        <p:txBody>
+          <a:bodyPr rtlCol="0" anchor="ctr"/>
+          <a:lstStyle/>
+          <a:p>
+            <a:pPr algn="ctr"/>
+          </a:p>
+        </p:txBody>
+      </p:sp>
+      <p:sp>
+        <p:nvSpPr>
+          <p:cNvPr id="46" name="Rectangle 45"/>
+          <p:cNvSpPr/>
+          <p:nvPr/>
+        </p:nvSpPr>
+        <p:spPr>
+          <a:xfrm>
+            <a:off x="8869680" y="768096"/>
+            <a:ext cx="3227832" cy="192024"/>
+          </a:xfrm>
+          <a:prstGeom prst="rect">
+            <a:avLst/>
+          </a:prstGeom>
+          <a:solidFill>
+            <a:srgbClr val="E6F4EA"/>
+          </a:solidFill>
+          <a:ln>
+            <a:noFill/>
+          </a:ln>
+        </p:spPr>
+        <p:style>
+          <a:lnRef idx="1">
+            <a:schemeClr val="accent1"/>
+          </a:lnRef>
+          <a:fillRef idx="3">
+            <a:schemeClr val="accent1"/>
+          </a:fillRef>
+          <a:effectRef idx="2">
+            <a:schemeClr val="accent1"/>
+          </a:effectRef>
+          <a:fontRef idx="minor">
+            <a:schemeClr val="lt1"/>
+          </a:fontRef>
+        </p:style>
+        <p:txBody>
+          <a:bodyPr rtlCol="0" anchor="ctr"/>
+          <a:lstStyle/>
+          <a:p>
+            <a:pPr algn="ctr"/>
+          </a:p>
+        </p:txBody>
+      </p:sp>
+      <p:sp>
+        <p:nvSpPr>
+          <p:cNvPr id="47" name="TextBox 46"/>
+          <p:cNvSpPr txBox="1"/>
+          <p:nvPr/>
+        </p:nvSpPr>
+        <p:spPr>
+          <a:xfrm>
+            <a:off x="8942832" y="786384"/>
+            <a:ext cx="3136392" cy="164592"/>
+          </a:xfrm>
+          <a:prstGeom prst="rect">
+            <a:avLst/>
+          </a:prstGeom>
+          <a:noFill/>
+        </p:spPr>
+        <p:txBody>
+          <a:bodyPr wrap="square">
+            <a:spAutoFit/>
+          </a:bodyPr>
+          <a:lstStyle/>
+          <a:p>
+            <a:pPr algn="l"/>
+            <a:r>
+              <a:rPr sz="750" b="1">
+                <a:solidFill>
+                  <a:srgbClr val="137333"/>
+                </a:solidFill>
+                <a:latin typeface="Arial"/>
+              </a:rPr>
+              <a:t>TTR &amp; PRODUCTIVITY</a:t>
+            </a:r>
+          </a:p>
+        </p:txBody>
+      </p:sp>
+      <p:sp>
+        <p:nvSpPr>
+          <p:cNvPr id="48" name="Rectangle 47"/>
+          <p:cNvSpPr/>
+          <p:nvPr/>
+        </p:nvSpPr>
+        <p:spPr>
+          <a:xfrm>
+            <a:off x="8869680" y="969264"/>
+            <a:ext cx="765810" cy="1005839"/>
           </a:xfrm>
           <a:prstGeom prst="rect">
             <a:avLst/>
@@ -4585,14 +4888,14 @@
       </p:sp>
       <p:sp>
         <p:nvSpPr>
-          <p:cNvPr id="41" name="TextBox 40"/>
+          <p:cNvPr id="49" name="TextBox 48"/>
           <p:cNvSpPr txBox="1"/>
           <p:nvPr/>
         </p:nvSpPr>
         <p:spPr>
           <a:xfrm>
-            <a:off x="7034784" y="1234440"/>
-            <a:ext cx="880872" cy="256032"/>
+            <a:off x="8887967" y="1005840"/>
+            <a:ext cx="729234" cy="502919"/>
           </a:xfrm>
           <a:prstGeom prst="rect">
             <a:avLst/>
@@ -4620,14 +4923,14 @@
       </p:sp>
       <p:sp>
         <p:nvSpPr>
-          <p:cNvPr id="42" name="TextBox 41"/>
+          <p:cNvPr id="50" name="TextBox 49"/>
           <p:cNvSpPr txBox="1"/>
           <p:nvPr/>
         </p:nvSpPr>
         <p:spPr>
           <a:xfrm>
-            <a:off x="7034784" y="1481328"/>
-            <a:ext cx="880872" cy="164592"/>
+            <a:off x="8887967" y="1492300"/>
+            <a:ext cx="729234" cy="261518"/>
           </a:xfrm>
           <a:prstGeom prst="rect">
             <a:avLst/>
@@ -4642,27 +4945,27 @@
           <a:p>
             <a:pPr algn="ctr"/>
             <a:r>
-              <a:rPr sz="800" b="0">
+              <a:rPr sz="750" b="0">
                 <a:solidFill>
                   <a:srgbClr val="5F6368"/>
                 </a:solidFill>
                 <a:latin typeface="Arial"/>
               </a:rPr>
-              <a:t>Ovr. TTR</a:t>
-            </a:r>
-          </a:p>
-        </p:txBody>
-      </p:sp>
-      <p:sp>
-        <p:nvSpPr>
-          <p:cNvPr id="43" name="Rectangle 42"/>
+              <a:t>Ovr TTR</a:t>
+            </a:r>
+          </a:p>
+        </p:txBody>
+      </p:sp>
+      <p:sp>
+        <p:nvSpPr>
+          <p:cNvPr id="51" name="Rectangle 50"/>
           <p:cNvSpPr/>
           <p:nvPr/>
         </p:nvSpPr>
         <p:spPr>
           <a:xfrm>
-            <a:off x="4227576" y="1737360"/>
-            <a:ext cx="880872" cy="457200"/>
+            <a:off x="9672065" y="969264"/>
+            <a:ext cx="765810" cy="1005839"/>
           </a:xfrm>
           <a:prstGeom prst="rect">
             <a:avLst/>
@@ -4698,14 +5001,14 @@
       </p:sp>
       <p:sp>
         <p:nvSpPr>
-          <p:cNvPr id="44" name="TextBox 43"/>
+          <p:cNvPr id="52" name="TextBox 51"/>
           <p:cNvSpPr txBox="1"/>
           <p:nvPr/>
         </p:nvSpPr>
         <p:spPr>
           <a:xfrm>
-            <a:off x="4227576" y="1764792"/>
-            <a:ext cx="880872" cy="256032"/>
+            <a:off x="9690353" y="1005840"/>
+            <a:ext cx="729234" cy="502919"/>
           </a:xfrm>
           <a:prstGeom prst="rect">
             <a:avLst/>
@@ -4733,14 +5036,14 @@
       </p:sp>
       <p:sp>
         <p:nvSpPr>
-          <p:cNvPr id="45" name="TextBox 44"/>
+          <p:cNvPr id="53" name="TextBox 52"/>
           <p:cNvSpPr txBox="1"/>
           <p:nvPr/>
         </p:nvSpPr>
         <p:spPr>
           <a:xfrm>
-            <a:off x="4227576" y="2011680"/>
-            <a:ext cx="880872" cy="164592"/>
+            <a:off x="9690353" y="1492300"/>
+            <a:ext cx="729234" cy="261518"/>
           </a:xfrm>
           <a:prstGeom prst="rect">
             <a:avLst/>
@@ -4755,7 +5058,7 @@
           <a:p>
             <a:pPr algn="ctr"/>
             <a:r>
-              <a:rPr sz="800" b="0">
+              <a:rPr sz="750" b="0">
                 <a:solidFill>
                   <a:srgbClr val="5F6368"/>
                 </a:solidFill>
@@ -4768,14 +5071,14 @@
       </p:sp>
       <p:sp>
         <p:nvSpPr>
-          <p:cNvPr id="46" name="Rectangle 45"/>
+          <p:cNvPr id="54" name="Rectangle 53"/>
           <p:cNvSpPr/>
           <p:nvPr/>
         </p:nvSpPr>
         <p:spPr>
           <a:xfrm>
-            <a:off x="5163312" y="1737360"/>
-            <a:ext cx="880872" cy="457200"/>
+            <a:off x="10474452" y="969264"/>
+            <a:ext cx="765810" cy="1005839"/>
           </a:xfrm>
           <a:prstGeom prst="rect">
             <a:avLst/>
@@ -4811,14 +5114,14 @@
       </p:sp>
       <p:sp>
         <p:nvSpPr>
-          <p:cNvPr id="47" name="TextBox 46"/>
+          <p:cNvPr id="55" name="TextBox 54"/>
           <p:cNvSpPr txBox="1"/>
           <p:nvPr/>
         </p:nvSpPr>
         <p:spPr>
           <a:xfrm>
-            <a:off x="5163312" y="1764792"/>
-            <a:ext cx="880872" cy="256032"/>
+            <a:off x="10492740" y="1005840"/>
+            <a:ext cx="729234" cy="502919"/>
           </a:xfrm>
           <a:prstGeom prst="rect">
             <a:avLst/>
@@ -4846,14 +5149,14 @@
       </p:sp>
       <p:sp>
         <p:nvSpPr>
-          <p:cNvPr id="48" name="TextBox 47"/>
+          <p:cNvPr id="56" name="TextBox 55"/>
           <p:cNvSpPr txBox="1"/>
           <p:nvPr/>
         </p:nvSpPr>
         <p:spPr>
           <a:xfrm>
-            <a:off x="5163312" y="2011680"/>
-            <a:ext cx="880872" cy="164592"/>
+            <a:off x="10492740" y="1492300"/>
+            <a:ext cx="729234" cy="261518"/>
           </a:xfrm>
           <a:prstGeom prst="rect">
             <a:avLst/>
@@ -4868,27 +5171,27 @@
           <a:p>
             <a:pPr algn="ctr"/>
             <a:r>
-              <a:rPr sz="800" b="0">
+              <a:rPr sz="750" b="0">
                 <a:solidFill>
                   <a:srgbClr val="5F6368"/>
                 </a:solidFill>
                 <a:latin typeface="Arial"/>
               </a:rPr>
-              <a:t>Ovr. Prod.</a:t>
-            </a:r>
-          </a:p>
-        </p:txBody>
-      </p:sp>
-      <p:sp>
-        <p:nvSpPr>
-          <p:cNvPr id="49" name="Rectangle 48"/>
+              <a:t>Ovr Prod.</a:t>
+            </a:r>
+          </a:p>
+        </p:txBody>
+      </p:sp>
+      <p:sp>
+        <p:nvSpPr>
+          <p:cNvPr id="57" name="Rectangle 56"/>
           <p:cNvSpPr/>
           <p:nvPr/>
         </p:nvSpPr>
         <p:spPr>
           <a:xfrm>
-            <a:off x="6099048" y="1737360"/>
-            <a:ext cx="880872" cy="457200"/>
+            <a:off x="11276838" y="969264"/>
+            <a:ext cx="765810" cy="1005839"/>
           </a:xfrm>
           <a:prstGeom prst="rect">
             <a:avLst/>
@@ -4924,14 +5227,14 @@
       </p:sp>
       <p:sp>
         <p:nvSpPr>
-          <p:cNvPr id="50" name="TextBox 49"/>
+          <p:cNvPr id="58" name="TextBox 57"/>
           <p:cNvSpPr txBox="1"/>
           <p:nvPr/>
         </p:nvSpPr>
         <p:spPr>
           <a:xfrm>
-            <a:off x="6099048" y="1764792"/>
-            <a:ext cx="880872" cy="256032"/>
+            <a:off x="11295126" y="1005840"/>
+            <a:ext cx="729234" cy="502919"/>
           </a:xfrm>
           <a:prstGeom prst="rect">
             <a:avLst/>
@@ -4959,14 +5262,14 @@
       </p:sp>
       <p:sp>
         <p:nvSpPr>
-          <p:cNvPr id="51" name="TextBox 50"/>
+          <p:cNvPr id="59" name="TextBox 58"/>
           <p:cNvSpPr txBox="1"/>
           <p:nvPr/>
         </p:nvSpPr>
         <p:spPr>
           <a:xfrm>
-            <a:off x="6099048" y="2011680"/>
-            <a:ext cx="880872" cy="164592"/>
+            <a:off x="11295126" y="1492300"/>
+            <a:ext cx="729234" cy="261518"/>
           </a:xfrm>
           <a:prstGeom prst="rect">
             <a:avLst/>
@@ -4981,38 +5284,36 @@
           <a:p>
             <a:pPr algn="ctr"/>
             <a:r>
-              <a:rPr sz="800" b="0">
+              <a:rPr sz="750" b="0">
                 <a:solidFill>
                   <a:srgbClr val="5F6368"/>
                 </a:solidFill>
                 <a:latin typeface="Arial"/>
               </a:rPr>
-              <a:t>Cls. Prod.</a:t>
-            </a:r>
-          </a:p>
-        </p:txBody>
-      </p:sp>
-      <p:sp>
-        <p:nvSpPr>
-          <p:cNvPr id="52" name="Rectangle 51"/>
+              <a:t>Cls Prod.</a:t>
+            </a:r>
+          </a:p>
+        </p:txBody>
+      </p:sp>
+      <p:sp>
+        <p:nvSpPr>
+          <p:cNvPr id="60" name="Rectangle 59"/>
           <p:cNvSpPr/>
           <p:nvPr/>
         </p:nvSpPr>
         <p:spPr>
           <a:xfrm>
-            <a:off x="4227576" y="2340864"/>
-            <a:ext cx="1812035" cy="402336"/>
+            <a:off x="4059326" y="1993391"/>
+            <a:ext cx="7315" cy="4636008"/>
           </a:xfrm>
           <a:prstGeom prst="rect">
             <a:avLst/>
           </a:prstGeom>
           <a:solidFill>
-            <a:srgbClr val="E6F4EA"/>
+            <a:srgbClr val="DADCE0"/>
           </a:solidFill>
-          <a:ln w="10160">
-            <a:solidFill>
-              <a:srgbClr val="137333"/>
-            </a:solidFill>
+          <a:ln>
+            <a:noFill/>
           </a:ln>
         </p:spPr>
         <p:style>
@@ -5039,95 +5340,23 @@
       </p:sp>
       <p:sp>
         <p:nvSpPr>
-          <p:cNvPr id="53" name="TextBox 52"/>
-          <p:cNvSpPr txBox="1"/>
-          <p:nvPr/>
-        </p:nvSpPr>
-        <p:spPr>
-          <a:xfrm>
-            <a:off x="4227576" y="2359152"/>
-            <a:ext cx="1812035" cy="237744"/>
-          </a:xfrm>
-          <a:prstGeom prst="rect">
-            <a:avLst/>
-          </a:prstGeom>
-          <a:noFill/>
-        </p:spPr>
-        <p:txBody>
-          <a:bodyPr wrap="square">
-            <a:spAutoFit/>
-          </a:bodyPr>
-          <a:lstStyle/>
-          <a:p>
-            <a:pPr algn="ctr"/>
-            <a:r>
-              <a:rPr sz="1800" b="1">
-                <a:solidFill>
-                  <a:srgbClr val="137333"/>
-                </a:solidFill>
-                <a:latin typeface="Arial"/>
-              </a:rPr>
-              <a:t>0%</a:t>
-            </a:r>
-          </a:p>
-        </p:txBody>
-      </p:sp>
-      <p:sp>
-        <p:nvSpPr>
-          <p:cNvPr id="54" name="TextBox 53"/>
-          <p:cNvSpPr txBox="1"/>
-          <p:nvPr/>
-        </p:nvSpPr>
-        <p:spPr>
-          <a:xfrm>
-            <a:off x="4227576" y="2587752"/>
-            <a:ext cx="1812035" cy="146304"/>
-          </a:xfrm>
-          <a:prstGeom prst="rect">
-            <a:avLst/>
-          </a:prstGeom>
-          <a:noFill/>
-        </p:spPr>
-        <p:txBody>
-          <a:bodyPr wrap="square">
-            <a:spAutoFit/>
-          </a:bodyPr>
-          <a:lstStyle/>
-          <a:p>
-            <a:pPr algn="ctr"/>
-            <a:r>
-              <a:rPr sz="800" b="1">
-                <a:solidFill>
-                  <a:srgbClr val="137333"/>
-                </a:solidFill>
-                <a:latin typeface="Arial"/>
-              </a:rPr>
-              <a:t>Escalations</a:t>
-            </a:r>
-          </a:p>
-        </p:txBody>
-      </p:sp>
-      <p:sp>
-        <p:nvSpPr>
-          <p:cNvPr id="55" name="Rectangle 54"/>
+          <p:cNvPr id="61" name="Rectangle 60"/>
           <p:cNvSpPr/>
           <p:nvPr/>
         </p:nvSpPr>
         <p:spPr>
           <a:xfrm>
-            <a:off x="6094475" y="2340864"/>
-            <a:ext cx="1812035" cy="402336"/>
+            <a:off x="8122310" y="1993391"/>
+            <a:ext cx="7315" cy="4636008"/>
           </a:xfrm>
           <a:prstGeom prst="rect">
             <a:avLst/>
           </a:prstGeom>
           <a:solidFill>
-            <a:srgbClr val="E6F4EA"/>
+            <a:srgbClr val="DADCE0"/>
           </a:solidFill>
-          <a:ln w="10160">
-            <a:solidFill>
-              <a:srgbClr val="137333"/>
-            </a:solidFill>
+          <a:ln>
+            <a:noFill/>
           </a:ln>
         </p:spPr>
         <p:style>
@@ -5154,84 +5383,14 @@
       </p:sp>
       <p:sp>
         <p:nvSpPr>
-          <p:cNvPr id="56" name="TextBox 55"/>
-          <p:cNvSpPr txBox="1"/>
-          <p:nvPr/>
-        </p:nvSpPr>
-        <p:spPr>
-          <a:xfrm>
-            <a:off x="6094475" y="2359152"/>
-            <a:ext cx="1812035" cy="237744"/>
-          </a:xfrm>
-          <a:prstGeom prst="rect">
-            <a:avLst/>
-          </a:prstGeom>
-          <a:noFill/>
-        </p:spPr>
-        <p:txBody>
-          <a:bodyPr wrap="square">
-            <a:spAutoFit/>
-          </a:bodyPr>
-          <a:lstStyle/>
-          <a:p>
-            <a:pPr algn="ctr"/>
-            <a:r>
-              <a:rPr sz="1800" b="1">
-                <a:solidFill>
-                  <a:srgbClr val="137333"/>
-                </a:solidFill>
-                <a:latin typeface="Arial"/>
-              </a:rPr>
-              <a:t>0%</a:t>
-            </a:r>
-          </a:p>
-        </p:txBody>
-      </p:sp>
-      <p:sp>
-        <p:nvSpPr>
-          <p:cNvPr id="57" name="TextBox 56"/>
-          <p:cNvSpPr txBox="1"/>
-          <p:nvPr/>
-        </p:nvSpPr>
-        <p:spPr>
-          <a:xfrm>
-            <a:off x="6094475" y="2587752"/>
-            <a:ext cx="1812035" cy="146304"/>
-          </a:xfrm>
-          <a:prstGeom prst="rect">
-            <a:avLst/>
-          </a:prstGeom>
-          <a:noFill/>
-        </p:spPr>
-        <p:txBody>
-          <a:bodyPr wrap="square">
-            <a:spAutoFit/>
-          </a:bodyPr>
-          <a:lstStyle/>
-          <a:p>
-            <a:pPr algn="ctr"/>
-            <a:r>
-              <a:rPr sz="800" b="1">
-                <a:solidFill>
-                  <a:srgbClr val="137333"/>
-                </a:solidFill>
-                <a:latin typeface="Arial"/>
-              </a:rPr>
-              <a:t>SLA Miss</a:t>
-            </a:r>
-          </a:p>
-        </p:txBody>
-      </p:sp>
-      <p:sp>
-        <p:nvSpPr>
-          <p:cNvPr id="58" name="Rectangle 57"/>
+          <p:cNvPr id="62" name="Rectangle 61"/>
           <p:cNvSpPr/>
           <p:nvPr/>
         </p:nvSpPr>
         <p:spPr>
           <a:xfrm>
-            <a:off x="8235695" y="987552"/>
-            <a:ext cx="3843528" cy="182880"/>
+            <a:off x="128016" y="2057399"/>
+            <a:ext cx="3806952" cy="192024"/>
           </a:xfrm>
           <a:prstGeom prst="rect">
             <a:avLst/>
@@ -5267,14 +5426,14 @@
       </p:sp>
       <p:sp>
         <p:nvSpPr>
-          <p:cNvPr id="59" name="TextBox 58"/>
+          <p:cNvPr id="63" name="TextBox 62"/>
           <p:cNvSpPr txBox="1"/>
           <p:nvPr/>
         </p:nvSpPr>
         <p:spPr>
           <a:xfrm>
-            <a:off x="8263128" y="987552"/>
-            <a:ext cx="3788664" cy="182880"/>
+            <a:off x="201168" y="2075687"/>
+            <a:ext cx="3715512" cy="164592"/>
           </a:xfrm>
           <a:prstGeom prst="rect">
             <a:avLst/>
@@ -5289,27 +5448,27 @@
           <a:p>
             <a:pPr algn="l"/>
             <a:r>
-              <a:rPr sz="800" b="1">
+              <a:rPr sz="750" b="1">
                 <a:solidFill>
                   <a:srgbClr val="137333"/>
                 </a:solidFill>
                 <a:latin typeface="Arial"/>
               </a:rPr>
-              <a:t>AUGUST PRIORITIES</a:t>
-            </a:r>
-          </a:p>
-        </p:txBody>
-      </p:sp>
-      <p:sp>
-        <p:nvSpPr>
-          <p:cNvPr id="60" name="TextBox 59"/>
+              <a:t>PRIORITIES</a:t>
+            </a:r>
+          </a:p>
+        </p:txBody>
+      </p:sp>
+      <p:sp>
+        <p:nvSpPr>
+          <p:cNvPr id="64" name="TextBox 63"/>
           <p:cNvSpPr txBox="1"/>
           <p:nvPr/>
         </p:nvSpPr>
         <p:spPr>
           <a:xfrm>
-            <a:off x="8290560" y="1207008"/>
-            <a:ext cx="3788664" cy="2510028"/>
+            <a:off x="128016" y="2276856"/>
+            <a:ext cx="3770375" cy="1970532"/>
           </a:xfrm>
           <a:prstGeom prst="rect">
             <a:avLst/>
@@ -5324,143 +5483,234 @@
           <a:p>
             <a:pPr>
               <a:spcBef>
-                <a:spcPts val="100"/>
+                <a:spcPts val="120"/>
               </a:spcBef>
             </a:pPr>
             <a:r>
               <a:rPr sz="900" b="1">
                 <a:solidFill>
-                  <a:srgbClr val="3C4043"/>
+                  <a:srgbClr val="1A1A1A"/>
                 </a:solidFill>
                 <a:latin typeface="Arial"/>
               </a:rPr>
-              <a:t>Team Collaboration:</a:t>
+              <a:t>Team Collaboration</a:t>
             </a:r>
           </a:p>
           <a:p>
             <a:pPr>
               <a:spcBef>
-                <a:spcPts val="100"/>
+                <a:spcPts val="120"/>
               </a:spcBef>
             </a:pPr>
             <a:r>
-              <a:rPr sz="900" b="0">
+              <a:rPr sz="850" b="0">
                 <a:solidFill>
                   <a:srgbClr val="3C4043"/>
                 </a:solidFill>
                 <a:latin typeface="Arial"/>
               </a:rPr>
-              <a:t>Work with new team members.</a:t>
+              <a:t>Work in collaboration with new team members.</a:t>
             </a:r>
           </a:p>
           <a:p>
             <a:pPr>
               <a:spcBef>
-                <a:spcPts val="100"/>
+                <a:spcPts val="120"/>
               </a:spcBef>
             </a:pPr>
             <a:r>
-              <a:rPr sz="900" b="1">
+              <a:rPr sz="300" b="0">
                 <a:solidFill>
                   <a:srgbClr val="3C4043"/>
                 </a:solidFill>
                 <a:latin typeface="Arial"/>
               </a:rPr>
-              <a:t>Skill Enhancement:</a:t>
+              <a:t> </a:t>
             </a:r>
           </a:p>
           <a:p>
             <a:pPr>
               <a:spcBef>
-                <a:spcPts val="100"/>
+                <a:spcPts val="120"/>
               </a:spcBef>
             </a:pPr>
             <a:r>
-              <a:rPr sz="900" b="0">
-                <a:solidFill>
-                  <a:srgbClr val="3C4043"/>
+              <a:rPr sz="900" b="1">
+                <a:solidFill>
+                  <a:srgbClr val="1A1A1A"/>
                 </a:solidFill>
                 <a:latin typeface="Arial"/>
               </a:rPr>
-              <a:t>Onboard Palavi Yadav for RCA Sev 1; reduce CPQ load.</a:t>
+              <a:t>Skill Enhancement</a:t>
             </a:r>
           </a:p>
           <a:p>
             <a:pPr>
               <a:spcBef>
-                <a:spcPts val="100"/>
+                <a:spcPts val="120"/>
               </a:spcBef>
             </a:pPr>
             <a:r>
-              <a:rPr sz="900" b="1">
+              <a:rPr sz="850" b="0">
                 <a:solidFill>
                   <a:srgbClr val="3C4043"/>
                 </a:solidFill>
                 <a:latin typeface="Arial"/>
               </a:rPr>
-              <a:t>Training:</a:t>
+              <a:t>Onboard Pallavi Yadav for RCA Sev 1 and reduce the CPQ load.</a:t>
             </a:r>
           </a:p>
           <a:p>
             <a:pPr>
               <a:spcBef>
-                <a:spcPts val="100"/>
+                <a:spcPts val="120"/>
               </a:spcBef>
             </a:pPr>
             <a:r>
-              <a:rPr sz="900" b="0">
+              <a:rPr sz="300" b="0">
                 <a:solidFill>
                   <a:srgbClr val="3C4043"/>
                 </a:solidFill>
                 <a:latin typeface="Arial"/>
               </a:rPr>
-              <a:t>LSC installation training via Salesforce Go (Success Guide support).</a:t>
+              <a:t> </a:t>
             </a:r>
           </a:p>
           <a:p>
             <a:pPr>
               <a:spcBef>
-                <a:spcPts val="100"/>
+                <a:spcPts val="120"/>
               </a:spcBef>
             </a:pPr>
             <a:r>
               <a:rPr sz="900" b="1">
                 <a:solidFill>
-                  <a:srgbClr val="3C4043"/>
+                  <a:srgbClr val="1A1A1A"/>
                 </a:solidFill>
                 <a:latin typeface="Arial"/>
               </a:rPr>
-              <a:t>MFA Support:</a:t>
+              <a:t>Training</a:t>
             </a:r>
           </a:p>
           <a:p>
             <a:pPr>
               <a:spcBef>
-                <a:spcPts val="100"/>
+                <a:spcPts val="120"/>
               </a:spcBef>
             </a:pPr>
             <a:r>
-              <a:rPr sz="900" b="0">
+              <a:rPr sz="850" b="0">
                 <a:solidFill>
                   <a:srgbClr val="3C4043"/>
                 </a:solidFill>
                 <a:latin typeface="Arial"/>
               </a:rPr>
-              <a:t>Pick MFA cases for Sales Cloud coverage.</a:t>
-            </a:r>
-          </a:p>
-        </p:txBody>
-      </p:sp>
-      <p:sp>
-        <p:nvSpPr>
-          <p:cNvPr id="61" name="Rectangle 60"/>
+              <a:t>LSC installation training via Salesforce Go (success guide if required).</a:t>
+            </a:r>
+          </a:p>
+          <a:p>
+            <a:pPr>
+              <a:spcBef>
+                <a:spcPts val="120"/>
+              </a:spcBef>
+            </a:pPr>
+            <a:r>
+              <a:rPr sz="300" b="0">
+                <a:solidFill>
+                  <a:srgbClr val="3C4043"/>
+                </a:solidFill>
+                <a:latin typeface="Arial"/>
+              </a:rPr>
+              <a:t> </a:t>
+            </a:r>
+          </a:p>
+          <a:p>
+            <a:pPr>
+              <a:spcBef>
+                <a:spcPts val="120"/>
+              </a:spcBef>
+            </a:pPr>
+            <a:r>
+              <a:rPr sz="900" b="1">
+                <a:solidFill>
+                  <a:srgbClr val="1A1A1A"/>
+                </a:solidFill>
+                <a:latin typeface="Arial"/>
+              </a:rPr>
+              <a:t>MFA Cases</a:t>
+            </a:r>
+          </a:p>
+          <a:p>
+            <a:pPr>
+              <a:spcBef>
+                <a:spcPts val="120"/>
+              </a:spcBef>
+            </a:pPr>
+            <a:r>
+              <a:rPr sz="850" b="0">
+                <a:solidFill>
+                  <a:srgbClr val="3C4043"/>
+                </a:solidFill>
+                <a:latin typeface="Arial"/>
+              </a:rPr>
+              <a:t>Provide support to Sales Cloud by picking MFA cases.</a:t>
+            </a:r>
+          </a:p>
+        </p:txBody>
+      </p:sp>
+      <p:sp>
+        <p:nvSpPr>
+          <p:cNvPr id="65" name="Rectangle 64"/>
           <p:cNvSpPr/>
           <p:nvPr/>
         </p:nvSpPr>
         <p:spPr>
           <a:xfrm>
-            <a:off x="109728" y="3845052"/>
-            <a:ext cx="3843528" cy="182880"/>
+            <a:off x="0" y="4311396"/>
+            <a:ext cx="4062984" cy="5486"/>
+          </a:xfrm>
+          <a:prstGeom prst="rect">
+            <a:avLst/>
+          </a:prstGeom>
+          <a:solidFill>
+            <a:srgbClr val="DADCE0"/>
+          </a:solidFill>
+          <a:ln>
+            <a:noFill/>
+          </a:ln>
+        </p:spPr>
+        <p:style>
+          <a:lnRef idx="1">
+            <a:schemeClr val="accent1"/>
+          </a:lnRef>
+          <a:fillRef idx="3">
+            <a:schemeClr val="accent1"/>
+          </a:fillRef>
+          <a:effectRef idx="2">
+            <a:schemeClr val="accent1"/>
+          </a:effectRef>
+          <a:fontRef idx="minor">
+            <a:schemeClr val="lt1"/>
+          </a:fontRef>
+        </p:style>
+        <p:txBody>
+          <a:bodyPr rtlCol="0" anchor="ctr"/>
+          <a:lstStyle/>
+          <a:p>
+            <a:pPr algn="ctr"/>
+          </a:p>
+        </p:txBody>
+      </p:sp>
+      <p:sp>
+        <p:nvSpPr>
+          <p:cNvPr id="66" name="Rectangle 65"/>
+          <p:cNvSpPr/>
+          <p:nvPr/>
+        </p:nvSpPr>
+        <p:spPr>
+          <a:xfrm>
+            <a:off x="128016" y="4357116"/>
+            <a:ext cx="3806952" cy="192024"/>
           </a:xfrm>
           <a:prstGeom prst="rect">
             <a:avLst/>
@@ -5496,14 +5746,14 @@
       </p:sp>
       <p:sp>
         <p:nvSpPr>
-          <p:cNvPr id="62" name="TextBox 61"/>
+          <p:cNvPr id="67" name="TextBox 66"/>
           <p:cNvSpPr txBox="1"/>
           <p:nvPr/>
         </p:nvSpPr>
         <p:spPr>
           <a:xfrm>
-            <a:off x="137160" y="3845052"/>
-            <a:ext cx="3788664" cy="182880"/>
+            <a:off x="201168" y="4375403"/>
+            <a:ext cx="3715512" cy="164592"/>
           </a:xfrm>
           <a:prstGeom prst="rect">
             <a:avLst/>
@@ -5518,7 +5768,204 @@
           <a:p>
             <a:pPr algn="l"/>
             <a:r>
-              <a:rPr sz="800" b="1">
+              <a:rPr sz="750" b="1">
+                <a:solidFill>
+                  <a:srgbClr val="137333"/>
+                </a:solidFill>
+                <a:latin typeface="Arial"/>
+              </a:rPr>
+              <a:t>POSITIVES &amp; HIGHLIGHTS</a:t>
+            </a:r>
+          </a:p>
+        </p:txBody>
+      </p:sp>
+      <p:sp>
+        <p:nvSpPr>
+          <p:cNvPr id="68" name="TextBox 67"/>
+          <p:cNvSpPr txBox="1"/>
+          <p:nvPr/>
+        </p:nvSpPr>
+        <p:spPr>
+          <a:xfrm>
+            <a:off x="128016" y="4576572"/>
+            <a:ext cx="3770375" cy="1997964"/>
+          </a:xfrm>
+          <a:prstGeom prst="rect">
+            <a:avLst/>
+          </a:prstGeom>
+          <a:noFill/>
+        </p:spPr>
+        <p:txBody>
+          <a:bodyPr wrap="square">
+            <a:spAutoFit/>
+          </a:bodyPr>
+          <a:lstStyle/>
+          <a:p>
+            <a:pPr>
+              <a:spcBef>
+                <a:spcPts val="120"/>
+              </a:spcBef>
+            </a:pPr>
+            <a:r>
+              <a:rPr sz="900" b="1">
+                <a:solidFill>
+                  <a:srgbClr val="0B5225"/>
+                </a:solidFill>
+                <a:latin typeface="Arial"/>
+              </a:rPr>
+              <a:t>✓  No escalations from the team</a:t>
+            </a:r>
+          </a:p>
+          <a:p>
+            <a:pPr>
+              <a:spcBef>
+                <a:spcPts val="120"/>
+              </a:spcBef>
+            </a:pPr>
+            <a:r>
+              <a:rPr sz="850" b="0">
+                <a:solidFill>
+                  <a:srgbClr val="3C4043"/>
+                </a:solidFill>
+                <a:latin typeface="Arial"/>
+              </a:rPr>
+              <a:t>✓  19 Premier cases picked up during low SIG inflow</a:t>
+            </a:r>
+          </a:p>
+          <a:p>
+            <a:pPr>
+              <a:spcBef>
+                <a:spcPts val="120"/>
+              </a:spcBef>
+            </a:pPr>
+            <a:r>
+              <a:rPr sz="850" b="0">
+                <a:solidFill>
+                  <a:srgbClr val="3C4043"/>
+                </a:solidFill>
+                <a:latin typeface="Arial"/>
+              </a:rPr>
+              <a:t>✓  11 Sales Security cases picked up additionally</a:t>
+            </a:r>
+          </a:p>
+          <a:p>
+            <a:pPr>
+              <a:spcBef>
+                <a:spcPts val="120"/>
+              </a:spcBef>
+            </a:pPr>
+            <a:r>
+              <a:rPr sz="850" b="0">
+                <a:solidFill>
+                  <a:srgbClr val="3C4043"/>
+                </a:solidFill>
+                <a:latin typeface="Arial"/>
+              </a:rPr>
+              <a:t>✓  Aniruddha: 9 Mktg Cloud (3 Premier + 6 Standard)</a:t>
+            </a:r>
+          </a:p>
+          <a:p>
+            <a:pPr>
+              <a:spcBef>
+                <a:spcPts val="120"/>
+              </a:spcBef>
+            </a:pPr>
+            <a:r>
+              <a:rPr sz="850" b="1">
+                <a:solidFill>
+                  <a:srgbClr val="0B5225"/>
+                </a:solidFill>
+                <a:latin typeface="Arial"/>
+              </a:rPr>
+              <a:t>✓  Closure (88) &gt; Inflow (78) — queue fully cleared</a:t>
+            </a:r>
+          </a:p>
+          <a:p>
+            <a:pPr>
+              <a:spcBef>
+                <a:spcPts val="120"/>
+              </a:spcBef>
+            </a:pPr>
+            <a:r>
+              <a:rPr sz="850" b="1">
+                <a:solidFill>
+                  <a:srgbClr val="0B5225"/>
+                </a:solidFill>
+                <a:latin typeface="Arial"/>
+              </a:rPr>
+              <a:t>✓  Overall productivity at 119% — team above target</a:t>
+            </a:r>
+          </a:p>
+        </p:txBody>
+      </p:sp>
+      <p:sp>
+        <p:nvSpPr>
+          <p:cNvPr id="69" name="Rectangle 68"/>
+          <p:cNvSpPr/>
+          <p:nvPr/>
+        </p:nvSpPr>
+        <p:spPr>
+          <a:xfrm>
+            <a:off x="4190999" y="2057399"/>
+            <a:ext cx="3806952" cy="192024"/>
+          </a:xfrm>
+          <a:prstGeom prst="rect">
+            <a:avLst/>
+          </a:prstGeom>
+          <a:solidFill>
+            <a:srgbClr val="E6F4EA"/>
+          </a:solidFill>
+          <a:ln>
+            <a:noFill/>
+          </a:ln>
+        </p:spPr>
+        <p:style>
+          <a:lnRef idx="1">
+            <a:schemeClr val="accent1"/>
+          </a:lnRef>
+          <a:fillRef idx="3">
+            <a:schemeClr val="accent1"/>
+          </a:fillRef>
+          <a:effectRef idx="2">
+            <a:schemeClr val="accent1"/>
+          </a:effectRef>
+          <a:fontRef idx="minor">
+            <a:schemeClr val="lt1"/>
+          </a:fontRef>
+        </p:style>
+        <p:txBody>
+          <a:bodyPr rtlCol="0" anchor="ctr"/>
+          <a:lstStyle/>
+          <a:p>
+            <a:pPr algn="ctr"/>
+          </a:p>
+        </p:txBody>
+      </p:sp>
+      <p:sp>
+        <p:nvSpPr>
+          <p:cNvPr id="70" name="TextBox 69"/>
+          <p:cNvSpPr txBox="1"/>
+          <p:nvPr/>
+        </p:nvSpPr>
+        <p:spPr>
+          <a:xfrm>
+            <a:off x="4264152" y="2075687"/>
+            <a:ext cx="3715512" cy="164592"/>
+          </a:xfrm>
+          <a:prstGeom prst="rect">
+            <a:avLst/>
+          </a:prstGeom>
+          <a:noFill/>
+        </p:spPr>
+        <p:txBody>
+          <a:bodyPr wrap="square">
+            <a:spAutoFit/>
+          </a:bodyPr>
+          <a:lstStyle/>
+          <a:p>
+            <a:pPr algn="l"/>
+            <a:r>
+              <a:rPr sz="750" b="1">
                 <a:solidFill>
                   <a:srgbClr val="137333"/>
                 </a:solidFill>
@@ -5531,14 +5978,57 @@
       </p:sp>
       <p:sp>
         <p:nvSpPr>
-          <p:cNvPr id="63" name="TextBox 62"/>
+          <p:cNvPr id="71" name="Rectangle 70"/>
+          <p:cNvSpPr/>
+          <p:nvPr/>
+        </p:nvSpPr>
+        <p:spPr>
+          <a:xfrm>
+            <a:off x="4172712" y="2276856"/>
+            <a:ext cx="3806952" cy="832103"/>
+          </a:xfrm>
+          <a:prstGeom prst="rect">
+            <a:avLst/>
+          </a:prstGeom>
+          <a:solidFill>
+            <a:srgbClr val="F8F9FA"/>
+          </a:solidFill>
+          <a:ln>
+            <a:noFill/>
+          </a:ln>
+        </p:spPr>
+        <p:style>
+          <a:lnRef idx="1">
+            <a:schemeClr val="accent1"/>
+          </a:lnRef>
+          <a:fillRef idx="3">
+            <a:schemeClr val="accent1"/>
+          </a:fillRef>
+          <a:effectRef idx="2">
+            <a:schemeClr val="accent1"/>
+          </a:effectRef>
+          <a:fontRef idx="minor">
+            <a:schemeClr val="lt1"/>
+          </a:fontRef>
+        </p:style>
+        <p:txBody>
+          <a:bodyPr rtlCol="0" anchor="ctr"/>
+          <a:lstStyle/>
+          <a:p>
+            <a:pPr algn="ctr"/>
+          </a:p>
+        </p:txBody>
+      </p:sp>
+      <p:sp>
+        <p:nvSpPr>
+          <p:cNvPr id="72" name="TextBox 71"/>
           <p:cNvSpPr txBox="1"/>
           <p:nvPr/>
         </p:nvSpPr>
         <p:spPr>
           <a:xfrm>
-            <a:off x="164592" y="4064508"/>
-            <a:ext cx="3788664" cy="256489"/>
+            <a:off x="4190999" y="2304287"/>
+            <a:ext cx="3313175" cy="182880"/>
           </a:xfrm>
           <a:prstGeom prst="rect">
             <a:avLst/>
@@ -5559,21 +6049,99 @@
                 </a:solidFill>
                 <a:latin typeface="Arial"/>
               </a:rPr>
-              <a:t>OmniStudio  —  23</a:t>
-            </a:r>
-          </a:p>
-        </p:txBody>
-      </p:sp>
-      <p:sp>
-        <p:nvSpPr>
-          <p:cNvPr id="64" name="Rectangle 63"/>
+              <a:t>OmniStudio</a:t>
+            </a:r>
+          </a:p>
+        </p:txBody>
+      </p:sp>
+      <p:sp>
+        <p:nvSpPr>
+          <p:cNvPr id="73" name="Rectangle 72"/>
           <p:cNvSpPr/>
           <p:nvPr/>
         </p:nvSpPr>
         <p:spPr>
           <a:xfrm>
-            <a:off x="164592" y="4310737"/>
-            <a:ext cx="3715512" cy="54864"/>
+            <a:off x="7559040" y="2304287"/>
+            <a:ext cx="365760" cy="173736"/>
+          </a:xfrm>
+          <a:prstGeom prst="rect">
+            <a:avLst/>
+          </a:prstGeom>
+          <a:solidFill>
+            <a:srgbClr val="1A73E8"/>
+          </a:solidFill>
+          <a:ln>
+            <a:noFill/>
+          </a:ln>
+        </p:spPr>
+        <p:style>
+          <a:lnRef idx="1">
+            <a:schemeClr val="accent1"/>
+          </a:lnRef>
+          <a:fillRef idx="3">
+            <a:schemeClr val="accent1"/>
+          </a:fillRef>
+          <a:effectRef idx="2">
+            <a:schemeClr val="accent1"/>
+          </a:effectRef>
+          <a:fontRef idx="minor">
+            <a:schemeClr val="lt1"/>
+          </a:fontRef>
+        </p:style>
+        <p:txBody>
+          <a:bodyPr rtlCol="0" anchor="ctr"/>
+          <a:lstStyle/>
+          <a:p>
+            <a:pPr algn="ctr"/>
+          </a:p>
+        </p:txBody>
+      </p:sp>
+      <p:sp>
+        <p:nvSpPr>
+          <p:cNvPr id="74" name="TextBox 73"/>
+          <p:cNvSpPr txBox="1"/>
+          <p:nvPr/>
+        </p:nvSpPr>
+        <p:spPr>
+          <a:xfrm>
+            <a:off x="7559040" y="2304287"/>
+            <a:ext cx="365760" cy="173736"/>
+          </a:xfrm>
+          <a:prstGeom prst="rect">
+            <a:avLst/>
+          </a:prstGeom>
+          <a:noFill/>
+        </p:spPr>
+        <p:txBody>
+          <a:bodyPr wrap="square">
+            <a:spAutoFit/>
+          </a:bodyPr>
+          <a:lstStyle/>
+          <a:p>
+            <a:pPr algn="ctr"/>
+            <a:r>
+              <a:rPr sz="950" b="1">
+                <a:solidFill>
+                  <a:srgbClr val="FFFFFF"/>
+                </a:solidFill>
+                <a:latin typeface="Arial"/>
+              </a:rPr>
+              <a:t>23</a:t>
+            </a:r>
+          </a:p>
+        </p:txBody>
+      </p:sp>
+      <p:sp>
+        <p:nvSpPr>
+          <p:cNvPr id="75" name="Rectangle 74"/>
+          <p:cNvSpPr/>
+          <p:nvPr/>
+        </p:nvSpPr>
+        <p:spPr>
+          <a:xfrm>
+            <a:off x="4190999" y="2505456"/>
+            <a:ext cx="3770375" cy="64008"/>
           </a:xfrm>
           <a:prstGeom prst="rect">
             <a:avLst/>
@@ -5609,14 +6177,14 @@
       </p:sp>
       <p:sp>
         <p:nvSpPr>
-          <p:cNvPr id="65" name="Rectangle 64"/>
+          <p:cNvPr id="76" name="Rectangle 75"/>
           <p:cNvSpPr/>
           <p:nvPr/>
         </p:nvSpPr>
         <p:spPr>
           <a:xfrm>
-            <a:off x="164592" y="4310737"/>
-            <a:ext cx="3715512" cy="54864"/>
+            <a:off x="4190999" y="2505456"/>
+            <a:ext cx="3770375" cy="64008"/>
           </a:xfrm>
           <a:prstGeom prst="rect">
             <a:avLst/>
@@ -5652,14 +6220,14 @@
       </p:sp>
       <p:sp>
         <p:nvSpPr>
-          <p:cNvPr id="66" name="TextBox 65"/>
+          <p:cNvPr id="77" name="TextBox 76"/>
           <p:cNvSpPr txBox="1"/>
           <p:nvPr/>
         </p:nvSpPr>
         <p:spPr>
           <a:xfrm>
-            <a:off x="164592" y="4382554"/>
-            <a:ext cx="3788664" cy="194931"/>
+            <a:off x="4190999" y="2587751"/>
+            <a:ext cx="3770375" cy="521207"/>
           </a:xfrm>
           <a:prstGeom prst="rect">
             <a:avLst/>
@@ -5680,21 +6248,65 @@
                 </a:solidFill>
                 <a:latin typeface="Arial"/>
               </a:rPr>
-              <a:t>FlexCard/OmniScript, Data Mapper, picklist, lookup &amp; merge errors</a:t>
-            </a:r>
-          </a:p>
-        </p:txBody>
-      </p:sp>
-      <p:sp>
-        <p:nvSpPr>
-          <p:cNvPr id="67" name="TextBox 66"/>
+              <a:t>FlexCard/OmniScript, Data Mapper, picklist,
+lookup &amp; merge field errors, component setup</a:t>
+            </a:r>
+          </a:p>
+        </p:txBody>
+      </p:sp>
+      <p:sp>
+        <p:nvSpPr>
+          <p:cNvPr id="78" name="Rectangle 77"/>
+          <p:cNvSpPr/>
+          <p:nvPr/>
+        </p:nvSpPr>
+        <p:spPr>
+          <a:xfrm>
+            <a:off x="4172712" y="3145535"/>
+            <a:ext cx="3806952" cy="832103"/>
+          </a:xfrm>
+          <a:prstGeom prst="rect">
+            <a:avLst/>
+          </a:prstGeom>
+          <a:solidFill>
+            <a:srgbClr val="FFFFFF"/>
+          </a:solidFill>
+          <a:ln>
+            <a:noFill/>
+          </a:ln>
+        </p:spPr>
+        <p:style>
+          <a:lnRef idx="1">
+            <a:schemeClr val="accent1"/>
+          </a:lnRef>
+          <a:fillRef idx="3">
+            <a:schemeClr val="accent1"/>
+          </a:fillRef>
+          <a:effectRef idx="2">
+            <a:schemeClr val="accent1"/>
+          </a:effectRef>
+          <a:fontRef idx="minor">
+            <a:schemeClr val="lt1"/>
+          </a:fontRef>
+        </p:style>
+        <p:txBody>
+          <a:bodyPr rtlCol="0" anchor="ctr"/>
+          <a:lstStyle/>
+          <a:p>
+            <a:pPr algn="ctr"/>
+          </a:p>
+        </p:txBody>
+      </p:sp>
+      <p:sp>
+        <p:nvSpPr>
+          <p:cNvPr id="79" name="TextBox 78"/>
           <p:cNvSpPr txBox="1"/>
           <p:nvPr/>
         </p:nvSpPr>
         <p:spPr>
           <a:xfrm>
-            <a:off x="164592" y="4577486"/>
-            <a:ext cx="3788664" cy="256489"/>
+            <a:off x="4190999" y="3172967"/>
+            <a:ext cx="3313175" cy="182880"/>
           </a:xfrm>
           <a:prstGeom prst="rect">
             <a:avLst/>
@@ -5715,21 +6327,99 @@
                 </a:solidFill>
                 <a:latin typeface="Arial"/>
               </a:rPr>
-              <a:t>Life Sciences  —  15</a:t>
-            </a:r>
-          </a:p>
-        </p:txBody>
-      </p:sp>
-      <p:sp>
-        <p:nvSpPr>
-          <p:cNvPr id="68" name="Rectangle 67"/>
+              <a:t>Life Sciences</a:t>
+            </a:r>
+          </a:p>
+        </p:txBody>
+      </p:sp>
+      <p:sp>
+        <p:nvSpPr>
+          <p:cNvPr id="80" name="Rectangle 79"/>
           <p:cNvSpPr/>
           <p:nvPr/>
         </p:nvSpPr>
         <p:spPr>
           <a:xfrm>
-            <a:off x="164592" y="4823715"/>
-            <a:ext cx="3715512" cy="54864"/>
+            <a:off x="7559040" y="3172967"/>
+            <a:ext cx="365760" cy="173736"/>
+          </a:xfrm>
+          <a:prstGeom prst="rect">
+            <a:avLst/>
+          </a:prstGeom>
+          <a:solidFill>
+            <a:srgbClr val="137333"/>
+          </a:solidFill>
+          <a:ln>
+            <a:noFill/>
+          </a:ln>
+        </p:spPr>
+        <p:style>
+          <a:lnRef idx="1">
+            <a:schemeClr val="accent1"/>
+          </a:lnRef>
+          <a:fillRef idx="3">
+            <a:schemeClr val="accent1"/>
+          </a:fillRef>
+          <a:effectRef idx="2">
+            <a:schemeClr val="accent1"/>
+          </a:effectRef>
+          <a:fontRef idx="minor">
+            <a:schemeClr val="lt1"/>
+          </a:fontRef>
+        </p:style>
+        <p:txBody>
+          <a:bodyPr rtlCol="0" anchor="ctr"/>
+          <a:lstStyle/>
+          <a:p>
+            <a:pPr algn="ctr"/>
+          </a:p>
+        </p:txBody>
+      </p:sp>
+      <p:sp>
+        <p:nvSpPr>
+          <p:cNvPr id="81" name="TextBox 80"/>
+          <p:cNvSpPr txBox="1"/>
+          <p:nvPr/>
+        </p:nvSpPr>
+        <p:spPr>
+          <a:xfrm>
+            <a:off x="7559040" y="3172967"/>
+            <a:ext cx="365760" cy="173736"/>
+          </a:xfrm>
+          <a:prstGeom prst="rect">
+            <a:avLst/>
+          </a:prstGeom>
+          <a:noFill/>
+        </p:spPr>
+        <p:txBody>
+          <a:bodyPr wrap="square">
+            <a:spAutoFit/>
+          </a:bodyPr>
+          <a:lstStyle/>
+          <a:p>
+            <a:pPr algn="ctr"/>
+            <a:r>
+              <a:rPr sz="950" b="1">
+                <a:solidFill>
+                  <a:srgbClr val="FFFFFF"/>
+                </a:solidFill>
+                <a:latin typeface="Arial"/>
+              </a:rPr>
+              <a:t>15</a:t>
+            </a:r>
+          </a:p>
+        </p:txBody>
+      </p:sp>
+      <p:sp>
+        <p:nvSpPr>
+          <p:cNvPr id="82" name="Rectangle 81"/>
+          <p:cNvSpPr/>
+          <p:nvPr/>
+        </p:nvSpPr>
+        <p:spPr>
+          <a:xfrm>
+            <a:off x="4190999" y="3374135"/>
+            <a:ext cx="3770375" cy="64008"/>
           </a:xfrm>
           <a:prstGeom prst="rect">
             <a:avLst/>
@@ -5765,14 +6455,1287 @@
       </p:sp>
       <p:sp>
         <p:nvSpPr>
-          <p:cNvPr id="69" name="Rectangle 68"/>
+          <p:cNvPr id="83" name="Rectangle 82"/>
           <p:cNvSpPr/>
           <p:nvPr/>
         </p:nvSpPr>
         <p:spPr>
           <a:xfrm>
-            <a:off x="164592" y="4823715"/>
-            <a:ext cx="2423160" cy="54864"/>
+            <a:off x="4190999" y="3374135"/>
+            <a:ext cx="2458940" cy="64008"/>
+          </a:xfrm>
+          <a:prstGeom prst="rect">
+            <a:avLst/>
+          </a:prstGeom>
+          <a:solidFill>
+            <a:srgbClr val="137333"/>
+          </a:solidFill>
+          <a:ln>
+            <a:noFill/>
+          </a:ln>
+        </p:spPr>
+        <p:style>
+          <a:lnRef idx="1">
+            <a:schemeClr val="accent1"/>
+          </a:lnRef>
+          <a:fillRef idx="3">
+            <a:schemeClr val="accent1"/>
+          </a:fillRef>
+          <a:effectRef idx="2">
+            <a:schemeClr val="accent1"/>
+          </a:effectRef>
+          <a:fontRef idx="minor">
+            <a:schemeClr val="lt1"/>
+          </a:fontRef>
+        </p:style>
+        <p:txBody>
+          <a:bodyPr rtlCol="0" anchor="ctr"/>
+          <a:lstStyle/>
+          <a:p>
+            <a:pPr algn="ctr"/>
+          </a:p>
+        </p:txBody>
+      </p:sp>
+      <p:sp>
+        <p:nvSpPr>
+          <p:cNvPr id="84" name="TextBox 83"/>
+          <p:cNvSpPr txBox="1"/>
+          <p:nvPr/>
+        </p:nvSpPr>
+        <p:spPr>
+          <a:xfrm>
+            <a:off x="4190999" y="3456431"/>
+            <a:ext cx="3770375" cy="521207"/>
+          </a:xfrm>
+          <a:prstGeom prst="rect">
+            <a:avLst/>
+          </a:prstGeom>
+          <a:noFill/>
+        </p:spPr>
+        <p:txBody>
+          <a:bodyPr wrap="square">
+            <a:spAutoFit/>
+          </a:bodyPr>
+          <a:lstStyle/>
+          <a:p>
+            <a:pPr algn="l"/>
+            <a:r>
+              <a:rPr sz="750" b="0">
+                <a:solidFill>
+                  <a:srgbClr val="5F6368"/>
+                </a:solidFill>
+                <a:latin typeface="Arial"/>
+              </a:rPr>
+              <a:t>Activity Plan errors, Map Pin issues,
+Sample Transfer errors, UI/Display issues</a:t>
+            </a:r>
+          </a:p>
+        </p:txBody>
+      </p:sp>
+      <p:sp>
+        <p:nvSpPr>
+          <p:cNvPr id="85" name="Rectangle 84"/>
+          <p:cNvSpPr/>
+          <p:nvPr/>
+        </p:nvSpPr>
+        <p:spPr>
+          <a:xfrm>
+            <a:off x="4172712" y="4014215"/>
+            <a:ext cx="3806952" cy="832103"/>
+          </a:xfrm>
+          <a:prstGeom prst="rect">
+            <a:avLst/>
+          </a:prstGeom>
+          <a:solidFill>
+            <a:srgbClr val="F8F9FA"/>
+          </a:solidFill>
+          <a:ln>
+            <a:noFill/>
+          </a:ln>
+        </p:spPr>
+        <p:style>
+          <a:lnRef idx="1">
+            <a:schemeClr val="accent1"/>
+          </a:lnRef>
+          <a:fillRef idx="3">
+            <a:schemeClr val="accent1"/>
+          </a:fillRef>
+          <a:effectRef idx="2">
+            <a:schemeClr val="accent1"/>
+          </a:effectRef>
+          <a:fontRef idx="minor">
+            <a:schemeClr val="lt1"/>
+          </a:fontRef>
+        </p:style>
+        <p:txBody>
+          <a:bodyPr rtlCol="0" anchor="ctr"/>
+          <a:lstStyle/>
+          <a:p>
+            <a:pPr algn="ctr"/>
+          </a:p>
+        </p:txBody>
+      </p:sp>
+      <p:sp>
+        <p:nvSpPr>
+          <p:cNvPr id="86" name="TextBox 85"/>
+          <p:cNvSpPr txBox="1"/>
+          <p:nvPr/>
+        </p:nvSpPr>
+        <p:spPr>
+          <a:xfrm>
+            <a:off x="4190999" y="4041648"/>
+            <a:ext cx="3313175" cy="182880"/>
+          </a:xfrm>
+          <a:prstGeom prst="rect">
+            <a:avLst/>
+          </a:prstGeom>
+          <a:noFill/>
+        </p:spPr>
+        <p:txBody>
+          <a:bodyPr wrap="square">
+            <a:spAutoFit/>
+          </a:bodyPr>
+          <a:lstStyle/>
+          <a:p>
+            <a:pPr algn="l"/>
+            <a:r>
+              <a:rPr sz="900" b="1">
+                <a:solidFill>
+                  <a:srgbClr val="1A1A1A"/>
+                </a:solidFill>
+                <a:latin typeface="Arial"/>
+              </a:rPr>
+              <a:t>Industry CPQ (Comm. Cloud)</a:t>
+            </a:r>
+          </a:p>
+        </p:txBody>
+      </p:sp>
+      <p:sp>
+        <p:nvSpPr>
+          <p:cNvPr id="87" name="Rectangle 86"/>
+          <p:cNvSpPr/>
+          <p:nvPr/>
+        </p:nvSpPr>
+        <p:spPr>
+          <a:xfrm>
+            <a:off x="7559040" y="4041648"/>
+            <a:ext cx="365760" cy="173736"/>
+          </a:xfrm>
+          <a:prstGeom prst="rect">
+            <a:avLst/>
+          </a:prstGeom>
+          <a:solidFill>
+            <a:srgbClr val="B06000"/>
+          </a:solidFill>
+          <a:ln>
+            <a:noFill/>
+          </a:ln>
+        </p:spPr>
+        <p:style>
+          <a:lnRef idx="1">
+            <a:schemeClr val="accent1"/>
+          </a:lnRef>
+          <a:fillRef idx="3">
+            <a:schemeClr val="accent1"/>
+          </a:fillRef>
+          <a:effectRef idx="2">
+            <a:schemeClr val="accent1"/>
+          </a:effectRef>
+          <a:fontRef idx="minor">
+            <a:schemeClr val="lt1"/>
+          </a:fontRef>
+        </p:style>
+        <p:txBody>
+          <a:bodyPr rtlCol="0" anchor="ctr"/>
+          <a:lstStyle/>
+          <a:p>
+            <a:pPr algn="ctr"/>
+          </a:p>
+        </p:txBody>
+      </p:sp>
+      <p:sp>
+        <p:nvSpPr>
+          <p:cNvPr id="88" name="TextBox 87"/>
+          <p:cNvSpPr txBox="1"/>
+          <p:nvPr/>
+        </p:nvSpPr>
+        <p:spPr>
+          <a:xfrm>
+            <a:off x="7559040" y="4041648"/>
+            <a:ext cx="365760" cy="173736"/>
+          </a:xfrm>
+          <a:prstGeom prst="rect">
+            <a:avLst/>
+          </a:prstGeom>
+          <a:noFill/>
+        </p:spPr>
+        <p:txBody>
+          <a:bodyPr wrap="square">
+            <a:spAutoFit/>
+          </a:bodyPr>
+          <a:lstStyle/>
+          <a:p>
+            <a:pPr algn="ctr"/>
+            <a:r>
+              <a:rPr sz="950" b="1">
+                <a:solidFill>
+                  <a:srgbClr val="FFFFFF"/>
+                </a:solidFill>
+                <a:latin typeface="Arial"/>
+              </a:rPr>
+              <a:t>7</a:t>
+            </a:r>
+          </a:p>
+        </p:txBody>
+      </p:sp>
+      <p:sp>
+        <p:nvSpPr>
+          <p:cNvPr id="89" name="Rectangle 88"/>
+          <p:cNvSpPr/>
+          <p:nvPr/>
+        </p:nvSpPr>
+        <p:spPr>
+          <a:xfrm>
+            <a:off x="4190999" y="4242816"/>
+            <a:ext cx="3770375" cy="64008"/>
+          </a:xfrm>
+          <a:prstGeom prst="rect">
+            <a:avLst/>
+          </a:prstGeom>
+          <a:solidFill>
+            <a:srgbClr val="F1F3F4"/>
+          </a:solidFill>
+          <a:ln>
+            <a:noFill/>
+          </a:ln>
+        </p:spPr>
+        <p:style>
+          <a:lnRef idx="1">
+            <a:schemeClr val="accent1"/>
+          </a:lnRef>
+          <a:fillRef idx="3">
+            <a:schemeClr val="accent1"/>
+          </a:fillRef>
+          <a:effectRef idx="2">
+            <a:schemeClr val="accent1"/>
+          </a:effectRef>
+          <a:fontRef idx="minor">
+            <a:schemeClr val="lt1"/>
+          </a:fontRef>
+        </p:style>
+        <p:txBody>
+          <a:bodyPr rtlCol="0" anchor="ctr"/>
+          <a:lstStyle/>
+          <a:p>
+            <a:pPr algn="ctr"/>
+          </a:p>
+        </p:txBody>
+      </p:sp>
+      <p:sp>
+        <p:nvSpPr>
+          <p:cNvPr id="90" name="Rectangle 89"/>
+          <p:cNvSpPr/>
+          <p:nvPr/>
+        </p:nvSpPr>
+        <p:spPr>
+          <a:xfrm>
+            <a:off x="4190999" y="4242816"/>
+            <a:ext cx="1147505" cy="64008"/>
+          </a:xfrm>
+          <a:prstGeom prst="rect">
+            <a:avLst/>
+          </a:prstGeom>
+          <a:solidFill>
+            <a:srgbClr val="B06000"/>
+          </a:solidFill>
+          <a:ln>
+            <a:noFill/>
+          </a:ln>
+        </p:spPr>
+        <p:style>
+          <a:lnRef idx="1">
+            <a:schemeClr val="accent1"/>
+          </a:lnRef>
+          <a:fillRef idx="3">
+            <a:schemeClr val="accent1"/>
+          </a:fillRef>
+          <a:effectRef idx="2">
+            <a:schemeClr val="accent1"/>
+          </a:effectRef>
+          <a:fontRef idx="minor">
+            <a:schemeClr val="lt1"/>
+          </a:fontRef>
+        </p:style>
+        <p:txBody>
+          <a:bodyPr rtlCol="0" anchor="ctr"/>
+          <a:lstStyle/>
+          <a:p>
+            <a:pPr algn="ctr"/>
+          </a:p>
+        </p:txBody>
+      </p:sp>
+      <p:sp>
+        <p:nvSpPr>
+          <p:cNvPr id="91" name="Rectangle 90"/>
+          <p:cNvSpPr/>
+          <p:nvPr/>
+        </p:nvSpPr>
+        <p:spPr>
+          <a:xfrm>
+            <a:off x="4172712" y="4882896"/>
+            <a:ext cx="3806952" cy="832103"/>
+          </a:xfrm>
+          <a:prstGeom prst="rect">
+            <a:avLst/>
+          </a:prstGeom>
+          <a:solidFill>
+            <a:srgbClr val="FFFFFF"/>
+          </a:solidFill>
+          <a:ln>
+            <a:noFill/>
+          </a:ln>
+        </p:spPr>
+        <p:style>
+          <a:lnRef idx="1">
+            <a:schemeClr val="accent1"/>
+          </a:lnRef>
+          <a:fillRef idx="3">
+            <a:schemeClr val="accent1"/>
+          </a:fillRef>
+          <a:effectRef idx="2">
+            <a:schemeClr val="accent1"/>
+          </a:effectRef>
+          <a:fontRef idx="minor">
+            <a:schemeClr val="lt1"/>
+          </a:fontRef>
+        </p:style>
+        <p:txBody>
+          <a:bodyPr rtlCol="0" anchor="ctr"/>
+          <a:lstStyle/>
+          <a:p>
+            <a:pPr algn="ctr"/>
+          </a:p>
+        </p:txBody>
+      </p:sp>
+      <p:sp>
+        <p:nvSpPr>
+          <p:cNvPr id="92" name="TextBox 91"/>
+          <p:cNvSpPr txBox="1"/>
+          <p:nvPr/>
+        </p:nvSpPr>
+        <p:spPr>
+          <a:xfrm>
+            <a:off x="4190999" y="4910328"/>
+            <a:ext cx="3313175" cy="182880"/>
+          </a:xfrm>
+          <a:prstGeom prst="rect">
+            <a:avLst/>
+          </a:prstGeom>
+          <a:noFill/>
+        </p:spPr>
+        <p:txBody>
+          <a:bodyPr wrap="square">
+            <a:spAutoFit/>
+          </a:bodyPr>
+          <a:lstStyle/>
+          <a:p>
+            <a:pPr algn="l"/>
+            <a:r>
+              <a:rPr sz="900" b="1">
+                <a:solidFill>
+                  <a:srgbClr val="1A1A1A"/>
+                </a:solidFill>
+                <a:latin typeface="Arial"/>
+              </a:rPr>
+              <a:t>FSC</a:t>
+            </a:r>
+          </a:p>
+        </p:txBody>
+      </p:sp>
+      <p:sp>
+        <p:nvSpPr>
+          <p:cNvPr id="93" name="Rectangle 92"/>
+          <p:cNvSpPr/>
+          <p:nvPr/>
+        </p:nvSpPr>
+        <p:spPr>
+          <a:xfrm>
+            <a:off x="7559040" y="4910328"/>
+            <a:ext cx="365760" cy="173736"/>
+          </a:xfrm>
+          <a:prstGeom prst="rect">
+            <a:avLst/>
+          </a:prstGeom>
+          <a:solidFill>
+            <a:srgbClr val="B06000"/>
+          </a:solidFill>
+          <a:ln>
+            <a:noFill/>
+          </a:ln>
+        </p:spPr>
+        <p:style>
+          <a:lnRef idx="1">
+            <a:schemeClr val="accent1"/>
+          </a:lnRef>
+          <a:fillRef idx="3">
+            <a:schemeClr val="accent1"/>
+          </a:fillRef>
+          <a:effectRef idx="2">
+            <a:schemeClr val="accent1"/>
+          </a:effectRef>
+          <a:fontRef idx="minor">
+            <a:schemeClr val="lt1"/>
+          </a:fontRef>
+        </p:style>
+        <p:txBody>
+          <a:bodyPr rtlCol="0" anchor="ctr"/>
+          <a:lstStyle/>
+          <a:p>
+            <a:pPr algn="ctr"/>
+          </a:p>
+        </p:txBody>
+      </p:sp>
+      <p:sp>
+        <p:nvSpPr>
+          <p:cNvPr id="94" name="TextBox 93"/>
+          <p:cNvSpPr txBox="1"/>
+          <p:nvPr/>
+        </p:nvSpPr>
+        <p:spPr>
+          <a:xfrm>
+            <a:off x="7559040" y="4910328"/>
+            <a:ext cx="365760" cy="173736"/>
+          </a:xfrm>
+          <a:prstGeom prst="rect">
+            <a:avLst/>
+          </a:prstGeom>
+          <a:noFill/>
+        </p:spPr>
+        <p:txBody>
+          <a:bodyPr wrap="square">
+            <a:spAutoFit/>
+          </a:bodyPr>
+          <a:lstStyle/>
+          <a:p>
+            <a:pPr algn="ctr"/>
+            <a:r>
+              <a:rPr sz="950" b="1">
+                <a:solidFill>
+                  <a:srgbClr val="FFFFFF"/>
+                </a:solidFill>
+                <a:latin typeface="Arial"/>
+              </a:rPr>
+              <a:t>6</a:t>
+            </a:r>
+          </a:p>
+        </p:txBody>
+      </p:sp>
+      <p:sp>
+        <p:nvSpPr>
+          <p:cNvPr id="95" name="Rectangle 94"/>
+          <p:cNvSpPr/>
+          <p:nvPr/>
+        </p:nvSpPr>
+        <p:spPr>
+          <a:xfrm>
+            <a:off x="4190999" y="5111496"/>
+            <a:ext cx="3770375" cy="64008"/>
+          </a:xfrm>
+          <a:prstGeom prst="rect">
+            <a:avLst/>
+          </a:prstGeom>
+          <a:solidFill>
+            <a:srgbClr val="F1F3F4"/>
+          </a:solidFill>
+          <a:ln>
+            <a:noFill/>
+          </a:ln>
+        </p:spPr>
+        <p:style>
+          <a:lnRef idx="1">
+            <a:schemeClr val="accent1"/>
+          </a:lnRef>
+          <a:fillRef idx="3">
+            <a:schemeClr val="accent1"/>
+          </a:fillRef>
+          <a:effectRef idx="2">
+            <a:schemeClr val="accent1"/>
+          </a:effectRef>
+          <a:fontRef idx="minor">
+            <a:schemeClr val="lt1"/>
+          </a:fontRef>
+        </p:style>
+        <p:txBody>
+          <a:bodyPr rtlCol="0" anchor="ctr"/>
+          <a:lstStyle/>
+          <a:p>
+            <a:pPr algn="ctr"/>
+          </a:p>
+        </p:txBody>
+      </p:sp>
+      <p:sp>
+        <p:nvSpPr>
+          <p:cNvPr id="96" name="Rectangle 95"/>
+          <p:cNvSpPr/>
+          <p:nvPr/>
+        </p:nvSpPr>
+        <p:spPr>
+          <a:xfrm>
+            <a:off x="4190999" y="5111496"/>
+            <a:ext cx="983576" cy="64008"/>
+          </a:xfrm>
+          <a:prstGeom prst="rect">
+            <a:avLst/>
+          </a:prstGeom>
+          <a:solidFill>
+            <a:srgbClr val="B06000"/>
+          </a:solidFill>
+          <a:ln>
+            <a:noFill/>
+          </a:ln>
+        </p:spPr>
+        <p:style>
+          <a:lnRef idx="1">
+            <a:schemeClr val="accent1"/>
+          </a:lnRef>
+          <a:fillRef idx="3">
+            <a:schemeClr val="accent1"/>
+          </a:fillRef>
+          <a:effectRef idx="2">
+            <a:schemeClr val="accent1"/>
+          </a:effectRef>
+          <a:fontRef idx="minor">
+            <a:schemeClr val="lt1"/>
+          </a:fontRef>
+        </p:style>
+        <p:txBody>
+          <a:bodyPr rtlCol="0" anchor="ctr"/>
+          <a:lstStyle/>
+          <a:p>
+            <a:pPr algn="ctr"/>
+          </a:p>
+        </p:txBody>
+      </p:sp>
+      <p:sp>
+        <p:nvSpPr>
+          <p:cNvPr id="97" name="TextBox 96"/>
+          <p:cNvSpPr txBox="1"/>
+          <p:nvPr/>
+        </p:nvSpPr>
+        <p:spPr>
+          <a:xfrm>
+            <a:off x="4190999" y="5193792"/>
+            <a:ext cx="3770375" cy="521207"/>
+          </a:xfrm>
+          <a:prstGeom prst="rect">
+            <a:avLst/>
+          </a:prstGeom>
+          <a:noFill/>
+        </p:spPr>
+        <p:txBody>
+          <a:bodyPr wrap="square">
+            <a:spAutoFit/>
+          </a:bodyPr>
+          <a:lstStyle/>
+          <a:p>
+            <a:pPr algn="l"/>
+            <a:r>
+              <a:rPr sz="750" b="0">
+                <a:solidFill>
+                  <a:srgbClr val="5F6368"/>
+                </a:solidFill>
+                <a:latin typeface="Arial"/>
+              </a:rPr>
+              <a:t>Object access related questions</a:t>
+            </a:r>
+          </a:p>
+        </p:txBody>
+      </p:sp>
+      <p:sp>
+        <p:nvSpPr>
+          <p:cNvPr id="98" name="Rectangle 97"/>
+          <p:cNvSpPr/>
+          <p:nvPr/>
+        </p:nvSpPr>
+        <p:spPr>
+          <a:xfrm>
+            <a:off x="4172712" y="5751575"/>
+            <a:ext cx="3806952" cy="832103"/>
+          </a:xfrm>
+          <a:prstGeom prst="rect">
+            <a:avLst/>
+          </a:prstGeom>
+          <a:solidFill>
+            <a:srgbClr val="F8F9FA"/>
+          </a:solidFill>
+          <a:ln>
+            <a:noFill/>
+          </a:ln>
+        </p:spPr>
+        <p:style>
+          <a:lnRef idx="1">
+            <a:schemeClr val="accent1"/>
+          </a:lnRef>
+          <a:fillRef idx="3">
+            <a:schemeClr val="accent1"/>
+          </a:fillRef>
+          <a:effectRef idx="2">
+            <a:schemeClr val="accent1"/>
+          </a:effectRef>
+          <a:fontRef idx="minor">
+            <a:schemeClr val="lt1"/>
+          </a:fontRef>
+        </p:style>
+        <p:txBody>
+          <a:bodyPr rtlCol="0" anchor="ctr"/>
+          <a:lstStyle/>
+          <a:p>
+            <a:pPr algn="ctr"/>
+          </a:p>
+        </p:txBody>
+      </p:sp>
+      <p:sp>
+        <p:nvSpPr>
+          <p:cNvPr id="99" name="TextBox 98"/>
+          <p:cNvSpPr txBox="1"/>
+          <p:nvPr/>
+        </p:nvSpPr>
+        <p:spPr>
+          <a:xfrm>
+            <a:off x="4190999" y="5779007"/>
+            <a:ext cx="3313175" cy="182880"/>
+          </a:xfrm>
+          <a:prstGeom prst="rect">
+            <a:avLst/>
+          </a:prstGeom>
+          <a:noFill/>
+        </p:spPr>
+        <p:txBody>
+          <a:bodyPr wrap="square">
+            <a:spAutoFit/>
+          </a:bodyPr>
+          <a:lstStyle/>
+          <a:p>
+            <a:pPr algn="l"/>
+            <a:r>
+              <a:rPr sz="900" b="1">
+                <a:solidFill>
+                  <a:srgbClr val="1A1A1A"/>
+                </a:solidFill>
+                <a:latin typeface="Arial"/>
+              </a:rPr>
+              <a:t>RCA (Configurator)</a:t>
+            </a:r>
+          </a:p>
+        </p:txBody>
+      </p:sp>
+      <p:sp>
+        <p:nvSpPr>
+          <p:cNvPr id="100" name="Rectangle 99"/>
+          <p:cNvSpPr/>
+          <p:nvPr/>
+        </p:nvSpPr>
+        <p:spPr>
+          <a:xfrm>
+            <a:off x="7559040" y="5779007"/>
+            <a:ext cx="365760" cy="173736"/>
+          </a:xfrm>
+          <a:prstGeom prst="rect">
+            <a:avLst/>
+          </a:prstGeom>
+          <a:solidFill>
+            <a:srgbClr val="5F6368"/>
+          </a:solidFill>
+          <a:ln>
+            <a:noFill/>
+          </a:ln>
+        </p:spPr>
+        <p:style>
+          <a:lnRef idx="1">
+            <a:schemeClr val="accent1"/>
+          </a:lnRef>
+          <a:fillRef idx="3">
+            <a:schemeClr val="accent1"/>
+          </a:fillRef>
+          <a:effectRef idx="2">
+            <a:schemeClr val="accent1"/>
+          </a:effectRef>
+          <a:fontRef idx="minor">
+            <a:schemeClr val="lt1"/>
+          </a:fontRef>
+        </p:style>
+        <p:txBody>
+          <a:bodyPr rtlCol="0" anchor="ctr"/>
+          <a:lstStyle/>
+          <a:p>
+            <a:pPr algn="ctr"/>
+          </a:p>
+        </p:txBody>
+      </p:sp>
+      <p:sp>
+        <p:nvSpPr>
+          <p:cNvPr id="101" name="TextBox 100"/>
+          <p:cNvSpPr txBox="1"/>
+          <p:nvPr/>
+        </p:nvSpPr>
+        <p:spPr>
+          <a:xfrm>
+            <a:off x="7559040" y="5779007"/>
+            <a:ext cx="365760" cy="173736"/>
+          </a:xfrm>
+          <a:prstGeom prst="rect">
+            <a:avLst/>
+          </a:prstGeom>
+          <a:noFill/>
+        </p:spPr>
+        <p:txBody>
+          <a:bodyPr wrap="square">
+            <a:spAutoFit/>
+          </a:bodyPr>
+          <a:lstStyle/>
+          <a:p>
+            <a:pPr algn="ctr"/>
+            <a:r>
+              <a:rPr sz="950" b="1">
+                <a:solidFill>
+                  <a:srgbClr val="FFFFFF"/>
+                </a:solidFill>
+                <a:latin typeface="Arial"/>
+              </a:rPr>
+              <a:t>5</a:t>
+            </a:r>
+          </a:p>
+        </p:txBody>
+      </p:sp>
+      <p:sp>
+        <p:nvSpPr>
+          <p:cNvPr id="102" name="Rectangle 101"/>
+          <p:cNvSpPr/>
+          <p:nvPr/>
+        </p:nvSpPr>
+        <p:spPr>
+          <a:xfrm>
+            <a:off x="4190999" y="5980175"/>
+            <a:ext cx="3770375" cy="64008"/>
+          </a:xfrm>
+          <a:prstGeom prst="rect">
+            <a:avLst/>
+          </a:prstGeom>
+          <a:solidFill>
+            <a:srgbClr val="F1F3F4"/>
+          </a:solidFill>
+          <a:ln>
+            <a:noFill/>
+          </a:ln>
+        </p:spPr>
+        <p:style>
+          <a:lnRef idx="1">
+            <a:schemeClr val="accent1"/>
+          </a:lnRef>
+          <a:fillRef idx="3">
+            <a:schemeClr val="accent1"/>
+          </a:fillRef>
+          <a:effectRef idx="2">
+            <a:schemeClr val="accent1"/>
+          </a:effectRef>
+          <a:fontRef idx="minor">
+            <a:schemeClr val="lt1"/>
+          </a:fontRef>
+        </p:style>
+        <p:txBody>
+          <a:bodyPr rtlCol="0" anchor="ctr"/>
+          <a:lstStyle/>
+          <a:p>
+            <a:pPr algn="ctr"/>
+          </a:p>
+        </p:txBody>
+      </p:sp>
+      <p:sp>
+        <p:nvSpPr>
+          <p:cNvPr id="103" name="Rectangle 102"/>
+          <p:cNvSpPr/>
+          <p:nvPr/>
+        </p:nvSpPr>
+        <p:spPr>
+          <a:xfrm>
+            <a:off x="4190999" y="5980175"/>
+            <a:ext cx="819646" cy="64008"/>
+          </a:xfrm>
+          <a:prstGeom prst="rect">
+            <a:avLst/>
+          </a:prstGeom>
+          <a:solidFill>
+            <a:srgbClr val="5F6368"/>
+          </a:solidFill>
+          <a:ln>
+            <a:noFill/>
+          </a:ln>
+        </p:spPr>
+        <p:style>
+          <a:lnRef idx="1">
+            <a:schemeClr val="accent1"/>
+          </a:lnRef>
+          <a:fillRef idx="3">
+            <a:schemeClr val="accent1"/>
+          </a:fillRef>
+          <a:effectRef idx="2">
+            <a:schemeClr val="accent1"/>
+          </a:effectRef>
+          <a:fontRef idx="minor">
+            <a:schemeClr val="lt1"/>
+          </a:fontRef>
+        </p:style>
+        <p:txBody>
+          <a:bodyPr rtlCol="0" anchor="ctr"/>
+          <a:lstStyle/>
+          <a:p>
+            <a:pPr algn="ctr"/>
+          </a:p>
+        </p:txBody>
+      </p:sp>
+      <p:sp>
+        <p:nvSpPr>
+          <p:cNvPr id="104" name="Rectangle 103"/>
+          <p:cNvSpPr/>
+          <p:nvPr/>
+        </p:nvSpPr>
+        <p:spPr>
+          <a:xfrm>
+            <a:off x="8253984" y="2057399"/>
+            <a:ext cx="3806952" cy="192024"/>
+          </a:xfrm>
+          <a:prstGeom prst="rect">
+            <a:avLst/>
+          </a:prstGeom>
+          <a:solidFill>
+            <a:srgbClr val="E6F4EA"/>
+          </a:solidFill>
+          <a:ln>
+            <a:noFill/>
+          </a:ln>
+        </p:spPr>
+        <p:style>
+          <a:lnRef idx="1">
+            <a:schemeClr val="accent1"/>
+          </a:lnRef>
+          <a:fillRef idx="3">
+            <a:schemeClr val="accent1"/>
+          </a:fillRef>
+          <a:effectRef idx="2">
+            <a:schemeClr val="accent1"/>
+          </a:effectRef>
+          <a:fontRef idx="minor">
+            <a:schemeClr val="lt1"/>
+          </a:fontRef>
+        </p:style>
+        <p:txBody>
+          <a:bodyPr rtlCol="0" anchor="ctr"/>
+          <a:lstStyle/>
+          <a:p>
+            <a:pPr algn="ctr"/>
+          </a:p>
+        </p:txBody>
+      </p:sp>
+      <p:sp>
+        <p:nvSpPr>
+          <p:cNvPr id="105" name="TextBox 104"/>
+          <p:cNvSpPr txBox="1"/>
+          <p:nvPr/>
+        </p:nvSpPr>
+        <p:spPr>
+          <a:xfrm>
+            <a:off x="8327136" y="2075687"/>
+            <a:ext cx="3715512" cy="164592"/>
+          </a:xfrm>
+          <a:prstGeom prst="rect">
+            <a:avLst/>
+          </a:prstGeom>
+          <a:noFill/>
+        </p:spPr>
+        <p:txBody>
+          <a:bodyPr wrap="square">
+            <a:spAutoFit/>
+          </a:bodyPr>
+          <a:lstStyle/>
+          <a:p>
+            <a:pPr algn="l"/>
+            <a:r>
+              <a:rPr sz="750" b="1">
+                <a:solidFill>
+                  <a:srgbClr val="137333"/>
+                </a:solidFill>
+                <a:latin typeface="Arial"/>
+              </a:rPr>
+              <a:t>ACCOUNT SIGNALS</a:t>
+            </a:r>
+          </a:p>
+        </p:txBody>
+      </p:sp>
+      <p:sp>
+        <p:nvSpPr>
+          <p:cNvPr id="106" name="Rectangle 105"/>
+          <p:cNvSpPr/>
+          <p:nvPr/>
+        </p:nvSpPr>
+        <p:spPr>
+          <a:xfrm>
+            <a:off x="8253984" y="2276856"/>
+            <a:ext cx="3770375" cy="1392936"/>
+          </a:xfrm>
+          <a:prstGeom prst="rect">
+            <a:avLst/>
+          </a:prstGeom>
+          <a:solidFill>
+            <a:srgbClr val="E6F4EA"/>
+          </a:solidFill>
+          <a:ln>
+            <a:noFill/>
+          </a:ln>
+        </p:spPr>
+        <p:style>
+          <a:lnRef idx="1">
+            <a:schemeClr val="accent1"/>
+          </a:lnRef>
+          <a:fillRef idx="3">
+            <a:schemeClr val="accent1"/>
+          </a:fillRef>
+          <a:effectRef idx="2">
+            <a:schemeClr val="accent1"/>
+          </a:effectRef>
+          <a:fontRef idx="minor">
+            <a:schemeClr val="lt1"/>
+          </a:fontRef>
+        </p:style>
+        <p:txBody>
+          <a:bodyPr rtlCol="0" anchor="ctr"/>
+          <a:lstStyle/>
+          <a:p>
+            <a:pPr algn="ctr"/>
+          </a:p>
+        </p:txBody>
+      </p:sp>
+      <p:sp>
+        <p:nvSpPr>
+          <p:cNvPr id="107" name="Rectangle 106"/>
+          <p:cNvSpPr/>
+          <p:nvPr/>
+        </p:nvSpPr>
+        <p:spPr>
+          <a:xfrm>
+            <a:off x="8253984" y="2276856"/>
+            <a:ext cx="54864" cy="1392936"/>
+          </a:xfrm>
+          <a:prstGeom prst="rect">
+            <a:avLst/>
+          </a:prstGeom>
+          <a:solidFill>
+            <a:srgbClr val="137333"/>
+          </a:solidFill>
+          <a:ln>
+            <a:noFill/>
+          </a:ln>
+        </p:spPr>
+        <p:style>
+          <a:lnRef idx="1">
+            <a:schemeClr val="accent1"/>
+          </a:lnRef>
+          <a:fillRef idx="3">
+            <a:schemeClr val="accent1"/>
+          </a:fillRef>
+          <a:effectRef idx="2">
+            <a:schemeClr val="accent1"/>
+          </a:effectRef>
+          <a:fontRef idx="minor">
+            <a:schemeClr val="lt1"/>
+          </a:fontRef>
+        </p:style>
+        <p:txBody>
+          <a:bodyPr rtlCol="0" anchor="ctr"/>
+          <a:lstStyle/>
+          <a:p>
+            <a:pPr algn="ctr"/>
+          </a:p>
+        </p:txBody>
+      </p:sp>
+      <p:sp>
+        <p:nvSpPr>
+          <p:cNvPr id="108" name="TextBox 107"/>
+          <p:cNvSpPr txBox="1"/>
+          <p:nvPr/>
+        </p:nvSpPr>
+        <p:spPr>
+          <a:xfrm>
+            <a:off x="8345424" y="2322575"/>
+            <a:ext cx="3642359" cy="201168"/>
+          </a:xfrm>
+          <a:prstGeom prst="rect">
+            <a:avLst/>
+          </a:prstGeom>
+          <a:noFill/>
+        </p:spPr>
+        <p:txBody>
+          <a:bodyPr wrap="square">
+            <a:spAutoFit/>
+          </a:bodyPr>
+          <a:lstStyle/>
+          <a:p>
+            <a:pPr algn="l"/>
+            <a:r>
+              <a:rPr sz="1000" b="1">
+                <a:solidFill>
+                  <a:srgbClr val="137333"/>
+                </a:solidFill>
+                <a:latin typeface="Arial"/>
+              </a:rPr>
+              <a:t>Claro</a:t>
+            </a:r>
+          </a:p>
+        </p:txBody>
+      </p:sp>
+      <p:sp>
+        <p:nvSpPr>
+          <p:cNvPr id="109" name="TextBox 108"/>
+          <p:cNvSpPr txBox="1"/>
+          <p:nvPr/>
+        </p:nvSpPr>
+        <p:spPr>
+          <a:xfrm>
+            <a:off x="8345424" y="2532887"/>
+            <a:ext cx="3642359" cy="1100327"/>
+          </a:xfrm>
+          <a:prstGeom prst="rect">
+            <a:avLst/>
+          </a:prstGeom>
+          <a:noFill/>
+        </p:spPr>
+        <p:txBody>
+          <a:bodyPr wrap="square">
+            <a:spAutoFit/>
+          </a:bodyPr>
+          <a:lstStyle/>
+          <a:p>
+            <a:pPr algn="l"/>
+            <a:r>
+              <a:rPr sz="850" b="0">
+                <a:solidFill>
+                  <a:srgbClr val="3C4043"/>
+                </a:solidFill>
+                <a:latin typeface="Arial"/>
+              </a:rPr>
+              <a:t>Recommendations shared with PS team — customer to be onboarded on improvements. CSM follow-up on Slack pending; case to close after CSM confirmation.</a:t>
+            </a:r>
+          </a:p>
+        </p:txBody>
+      </p:sp>
+      <p:sp>
+        <p:nvSpPr>
+          <p:cNvPr id="110" name="Rectangle 109"/>
+          <p:cNvSpPr/>
+          <p:nvPr/>
+        </p:nvSpPr>
+        <p:spPr>
+          <a:xfrm>
+            <a:off x="8253984" y="3724656"/>
+            <a:ext cx="3770375" cy="1392936"/>
+          </a:xfrm>
+          <a:prstGeom prst="rect">
+            <a:avLst/>
+          </a:prstGeom>
+          <a:solidFill>
+            <a:srgbClr val="FEF7E0"/>
+          </a:solidFill>
+          <a:ln>
+            <a:noFill/>
+          </a:ln>
+        </p:spPr>
+        <p:style>
+          <a:lnRef idx="1">
+            <a:schemeClr val="accent1"/>
+          </a:lnRef>
+          <a:fillRef idx="3">
+            <a:schemeClr val="accent1"/>
+          </a:fillRef>
+          <a:effectRef idx="2">
+            <a:schemeClr val="accent1"/>
+          </a:effectRef>
+          <a:fontRef idx="minor">
+            <a:schemeClr val="lt1"/>
+          </a:fontRef>
+        </p:style>
+        <p:txBody>
+          <a:bodyPr rtlCol="0" anchor="ctr"/>
+          <a:lstStyle/>
+          <a:p>
+            <a:pPr algn="ctr"/>
+          </a:p>
+        </p:txBody>
+      </p:sp>
+      <p:sp>
+        <p:nvSpPr>
+          <p:cNvPr id="111" name="Rectangle 110"/>
+          <p:cNvSpPr/>
+          <p:nvPr/>
+        </p:nvSpPr>
+        <p:spPr>
+          <a:xfrm>
+            <a:off x="8253984" y="3724656"/>
+            <a:ext cx="54864" cy="1392936"/>
+          </a:xfrm>
+          <a:prstGeom prst="rect">
+            <a:avLst/>
+          </a:prstGeom>
+          <a:solidFill>
+            <a:srgbClr val="B06000"/>
+          </a:solidFill>
+          <a:ln>
+            <a:noFill/>
+          </a:ln>
+        </p:spPr>
+        <p:style>
+          <a:lnRef idx="1">
+            <a:schemeClr val="accent1"/>
+          </a:lnRef>
+          <a:fillRef idx="3">
+            <a:schemeClr val="accent1"/>
+          </a:fillRef>
+          <a:effectRef idx="2">
+            <a:schemeClr val="accent1"/>
+          </a:effectRef>
+          <a:fontRef idx="minor">
+            <a:schemeClr val="lt1"/>
+          </a:fontRef>
+        </p:style>
+        <p:txBody>
+          <a:bodyPr rtlCol="0" anchor="ctr"/>
+          <a:lstStyle/>
+          <a:p>
+            <a:pPr algn="ctr"/>
+          </a:p>
+        </p:txBody>
+      </p:sp>
+      <p:sp>
+        <p:nvSpPr>
+          <p:cNvPr id="112" name="TextBox 111"/>
+          <p:cNvSpPr txBox="1"/>
+          <p:nvPr/>
+        </p:nvSpPr>
+        <p:spPr>
+          <a:xfrm>
+            <a:off x="8345424" y="3770375"/>
+            <a:ext cx="3642359" cy="201168"/>
+          </a:xfrm>
+          <a:prstGeom prst="rect">
+            <a:avLst/>
+          </a:prstGeom>
+          <a:noFill/>
+        </p:spPr>
+        <p:txBody>
+          <a:bodyPr wrap="square">
+            <a:spAutoFit/>
+          </a:bodyPr>
+          <a:lstStyle/>
+          <a:p>
+            <a:pPr algn="l"/>
+            <a:r>
+              <a:rPr sz="1000" b="1">
+                <a:solidFill>
+                  <a:srgbClr val="B06000"/>
+                </a:solidFill>
+                <a:latin typeface="Arial"/>
+              </a:rPr>
+              <a:t>Veeam  🔴  Running Hot</a:t>
+            </a:r>
+          </a:p>
+        </p:txBody>
+      </p:sp>
+      <p:sp>
+        <p:nvSpPr>
+          <p:cNvPr id="113" name="TextBox 112"/>
+          <p:cNvSpPr txBox="1"/>
+          <p:nvPr/>
+        </p:nvSpPr>
+        <p:spPr>
+          <a:xfrm>
+            <a:off x="8345424" y="3980688"/>
+            <a:ext cx="3642359" cy="1100327"/>
+          </a:xfrm>
+          <a:prstGeom prst="rect">
+            <a:avLst/>
+          </a:prstGeom>
+          <a:noFill/>
+        </p:spPr>
+        <p:txBody>
+          <a:bodyPr wrap="square">
+            <a:spAutoFit/>
+          </a:bodyPr>
+          <a:lstStyle/>
+          <a:p>
+            <a:pPr algn="l"/>
+            <a:r>
+              <a:rPr sz="850" b="0">
+                <a:solidFill>
+                  <a:srgbClr val="3C4043"/>
+                </a:solidFill>
+                <a:latin typeface="Arial"/>
+              </a:rPr>
+              <a:t>Meeting scheduled to work on transactional issues. Customer running hot due to multiple implementation issues. RCA SA engaged.</a:t>
+            </a:r>
+          </a:p>
+        </p:txBody>
+      </p:sp>
+      <p:sp>
+        <p:nvSpPr>
+          <p:cNvPr id="114" name="Rectangle 113"/>
+          <p:cNvSpPr/>
+          <p:nvPr/>
+        </p:nvSpPr>
+        <p:spPr>
+          <a:xfrm>
+            <a:off x="8253984" y="5172456"/>
+            <a:ext cx="3770375" cy="1392936"/>
+          </a:xfrm>
+          <a:prstGeom prst="rect">
+            <a:avLst/>
+          </a:prstGeom>
+          <a:solidFill>
+            <a:srgbClr val="E8F0FE"/>
+          </a:solidFill>
+          <a:ln>
+            <a:noFill/>
+          </a:ln>
+        </p:spPr>
+        <p:style>
+          <a:lnRef idx="1">
+            <a:schemeClr val="accent1"/>
+          </a:lnRef>
+          <a:fillRef idx="3">
+            <a:schemeClr val="accent1"/>
+          </a:fillRef>
+          <a:effectRef idx="2">
+            <a:schemeClr val="accent1"/>
+          </a:effectRef>
+          <a:fontRef idx="minor">
+            <a:schemeClr val="lt1"/>
+          </a:fontRef>
+        </p:style>
+        <p:txBody>
+          <a:bodyPr rtlCol="0" anchor="ctr"/>
+          <a:lstStyle/>
+          <a:p>
+            <a:pPr algn="ctr"/>
+          </a:p>
+        </p:txBody>
+      </p:sp>
+      <p:sp>
+        <p:nvSpPr>
+          <p:cNvPr id="115" name="Rectangle 114"/>
+          <p:cNvSpPr/>
+          <p:nvPr/>
+        </p:nvSpPr>
+        <p:spPr>
+          <a:xfrm>
+            <a:off x="8253984" y="5172456"/>
+            <a:ext cx="54864" cy="1392936"/>
           </a:xfrm>
           <a:prstGeom prst="rect">
             <a:avLst/>
@@ -5808,14 +7771,14 @@
       </p:sp>
       <p:sp>
         <p:nvSpPr>
-          <p:cNvPr id="70" name="TextBox 69"/>
+          <p:cNvPr id="116" name="TextBox 115"/>
           <p:cNvSpPr txBox="1"/>
           <p:nvPr/>
         </p:nvSpPr>
         <p:spPr>
           <a:xfrm>
-            <a:off x="164592" y="4895532"/>
-            <a:ext cx="3788664" cy="194931"/>
+            <a:off x="8345424" y="5218175"/>
+            <a:ext cx="3642359" cy="201168"/>
           </a:xfrm>
           <a:prstGeom prst="rect">
             <a:avLst/>
@@ -5830,27 +7793,27 @@
           <a:p>
             <a:pPr algn="l"/>
             <a:r>
-              <a:rPr sz="750" b="0">
-                <a:solidFill>
-                  <a:srgbClr val="5F6368"/>
+              <a:rPr sz="1000" b="1">
+                <a:solidFill>
+                  <a:srgbClr val="1A73E8"/>
                 </a:solidFill>
                 <a:latin typeface="Arial"/>
               </a:rPr>
-              <a:t>Activity Plan errors, Map Pin, Sample Transfer, UI/display issues</a:t>
-            </a:r>
-          </a:p>
-        </p:txBody>
-      </p:sp>
-      <p:sp>
-        <p:nvSpPr>
-          <p:cNvPr id="71" name="TextBox 70"/>
+              <a:t>Pfizer</a:t>
+            </a:r>
+          </a:p>
+        </p:txBody>
+      </p:sp>
+      <p:sp>
+        <p:nvSpPr>
+          <p:cNvPr id="117" name="TextBox 116"/>
           <p:cNvSpPr txBox="1"/>
           <p:nvPr/>
         </p:nvSpPr>
         <p:spPr>
           <a:xfrm>
-            <a:off x="164592" y="5090464"/>
-            <a:ext cx="3788664" cy="256489"/>
+            <a:off x="8345424" y="5428488"/>
+            <a:ext cx="3642359" cy="1100327"/>
           </a:xfrm>
           <a:prstGeom prst="rect">
             <a:avLst/>
@@ -5865,468 +7828,27 @@
           <a:p>
             <a:pPr algn="l"/>
             <a:r>
-              <a:rPr sz="900" b="1">
-                <a:solidFill>
-                  <a:srgbClr val="1A1A1A"/>
+              <a:rPr sz="850" b="0">
+                <a:solidFill>
+                  <a:srgbClr val="3C4043"/>
                 </a:solidFill>
                 <a:latin typeface="Arial"/>
               </a:rPr>
-              <a:t>Industry CPQ (Comm. Cloud)  —  7</a:t>
-            </a:r>
-          </a:p>
-        </p:txBody>
-      </p:sp>
-      <p:sp>
-        <p:nvSpPr>
-          <p:cNvPr id="72" name="Rectangle 71"/>
+              <a:t>Event monitoring cases open — new alignment needs to be clarified with Harish Raja by @tushar. Follow-up call scheduled tomorrow.</a:t>
+            </a:r>
+          </a:p>
+        </p:txBody>
+      </p:sp>
+      <p:sp>
+        <p:nvSpPr>
+          <p:cNvPr id="118" name="Rectangle 117"/>
           <p:cNvSpPr/>
           <p:nvPr/>
         </p:nvSpPr>
         <p:spPr>
           <a:xfrm>
-            <a:off x="164592" y="5336693"/>
-            <a:ext cx="3715512" cy="54864"/>
-          </a:xfrm>
-          <a:prstGeom prst="rect">
-            <a:avLst/>
-          </a:prstGeom>
-          <a:solidFill>
-            <a:srgbClr val="F1F3F4"/>
-          </a:solidFill>
-          <a:ln>
-            <a:noFill/>
-          </a:ln>
-        </p:spPr>
-        <p:style>
-          <a:lnRef idx="1">
-            <a:schemeClr val="accent1"/>
-          </a:lnRef>
-          <a:fillRef idx="3">
-            <a:schemeClr val="accent1"/>
-          </a:fillRef>
-          <a:effectRef idx="2">
-            <a:schemeClr val="accent1"/>
-          </a:effectRef>
-          <a:fontRef idx="minor">
-            <a:schemeClr val="lt1"/>
-          </a:fontRef>
-        </p:style>
-        <p:txBody>
-          <a:bodyPr rtlCol="0" anchor="ctr"/>
-          <a:lstStyle/>
-          <a:p>
-            <a:pPr algn="ctr"/>
-          </a:p>
-        </p:txBody>
-      </p:sp>
-      <p:sp>
-        <p:nvSpPr>
-          <p:cNvPr id="73" name="Rectangle 72"/>
-          <p:cNvSpPr/>
-          <p:nvPr/>
-        </p:nvSpPr>
-        <p:spPr>
-          <a:xfrm>
-            <a:off x="164592" y="5336693"/>
-            <a:ext cx="1130808" cy="54864"/>
-          </a:xfrm>
-          <a:prstGeom prst="rect">
-            <a:avLst/>
-          </a:prstGeom>
-          <a:solidFill>
-            <a:srgbClr val="B06000"/>
-          </a:solidFill>
-          <a:ln>
-            <a:noFill/>
-          </a:ln>
-        </p:spPr>
-        <p:style>
-          <a:lnRef idx="1">
-            <a:schemeClr val="accent1"/>
-          </a:lnRef>
-          <a:fillRef idx="3">
-            <a:schemeClr val="accent1"/>
-          </a:fillRef>
-          <a:effectRef idx="2">
-            <a:schemeClr val="accent1"/>
-          </a:effectRef>
-          <a:fontRef idx="minor">
-            <a:schemeClr val="lt1"/>
-          </a:fontRef>
-        </p:style>
-        <p:txBody>
-          <a:bodyPr rtlCol="0" anchor="ctr"/>
-          <a:lstStyle/>
-          <a:p>
-            <a:pPr algn="ctr"/>
-          </a:p>
-        </p:txBody>
-      </p:sp>
-      <p:sp>
-        <p:nvSpPr>
-          <p:cNvPr id="74" name="TextBox 73"/>
-          <p:cNvSpPr txBox="1"/>
-          <p:nvPr/>
-        </p:nvSpPr>
-        <p:spPr>
-          <a:xfrm>
-            <a:off x="164592" y="5603443"/>
-            <a:ext cx="3788664" cy="256489"/>
-          </a:xfrm>
-          <a:prstGeom prst="rect">
-            <a:avLst/>
-          </a:prstGeom>
-          <a:noFill/>
-        </p:spPr>
-        <p:txBody>
-          <a:bodyPr wrap="square">
-            <a:spAutoFit/>
-          </a:bodyPr>
-          <a:lstStyle/>
-          <a:p>
-            <a:pPr algn="l"/>
-            <a:r>
-              <a:rPr sz="900" b="1">
-                <a:solidFill>
-                  <a:srgbClr val="1A1A1A"/>
-                </a:solidFill>
-                <a:latin typeface="Arial"/>
-              </a:rPr>
-              <a:t>FSC  —  6</a:t>
-            </a:r>
-          </a:p>
-        </p:txBody>
-      </p:sp>
-      <p:sp>
-        <p:nvSpPr>
-          <p:cNvPr id="75" name="Rectangle 74"/>
-          <p:cNvSpPr/>
-          <p:nvPr/>
-        </p:nvSpPr>
-        <p:spPr>
-          <a:xfrm>
-            <a:off x="164592" y="5849672"/>
-            <a:ext cx="3715512" cy="54864"/>
-          </a:xfrm>
-          <a:prstGeom prst="rect">
-            <a:avLst/>
-          </a:prstGeom>
-          <a:solidFill>
-            <a:srgbClr val="F1F3F4"/>
-          </a:solidFill>
-          <a:ln>
-            <a:noFill/>
-          </a:ln>
-        </p:spPr>
-        <p:style>
-          <a:lnRef idx="1">
-            <a:schemeClr val="accent1"/>
-          </a:lnRef>
-          <a:fillRef idx="3">
-            <a:schemeClr val="accent1"/>
-          </a:fillRef>
-          <a:effectRef idx="2">
-            <a:schemeClr val="accent1"/>
-          </a:effectRef>
-          <a:fontRef idx="minor">
-            <a:schemeClr val="lt1"/>
-          </a:fontRef>
-        </p:style>
-        <p:txBody>
-          <a:bodyPr rtlCol="0" anchor="ctr"/>
-          <a:lstStyle/>
-          <a:p>
-            <a:pPr algn="ctr"/>
-          </a:p>
-        </p:txBody>
-      </p:sp>
-      <p:sp>
-        <p:nvSpPr>
-          <p:cNvPr id="76" name="Rectangle 75"/>
-          <p:cNvSpPr/>
-          <p:nvPr/>
-        </p:nvSpPr>
-        <p:spPr>
-          <a:xfrm>
-            <a:off x="164592" y="5849672"/>
-            <a:ext cx="969264" cy="54864"/>
-          </a:xfrm>
-          <a:prstGeom prst="rect">
-            <a:avLst/>
-          </a:prstGeom>
-          <a:solidFill>
-            <a:srgbClr val="B06000"/>
-          </a:solidFill>
-          <a:ln>
-            <a:noFill/>
-          </a:ln>
-        </p:spPr>
-        <p:style>
-          <a:lnRef idx="1">
-            <a:schemeClr val="accent1"/>
-          </a:lnRef>
-          <a:fillRef idx="3">
-            <a:schemeClr val="accent1"/>
-          </a:fillRef>
-          <a:effectRef idx="2">
-            <a:schemeClr val="accent1"/>
-          </a:effectRef>
-          <a:fontRef idx="minor">
-            <a:schemeClr val="lt1"/>
-          </a:fontRef>
-        </p:style>
-        <p:txBody>
-          <a:bodyPr rtlCol="0" anchor="ctr"/>
-          <a:lstStyle/>
-          <a:p>
-            <a:pPr algn="ctr"/>
-          </a:p>
-        </p:txBody>
-      </p:sp>
-      <p:sp>
-        <p:nvSpPr>
-          <p:cNvPr id="77" name="TextBox 76"/>
-          <p:cNvSpPr txBox="1"/>
-          <p:nvPr/>
-        </p:nvSpPr>
-        <p:spPr>
-          <a:xfrm>
-            <a:off x="164592" y="5921489"/>
-            <a:ext cx="3788664" cy="194931"/>
-          </a:xfrm>
-          <a:prstGeom prst="rect">
-            <a:avLst/>
-          </a:prstGeom>
-          <a:noFill/>
-        </p:spPr>
-        <p:txBody>
-          <a:bodyPr wrap="square">
-            <a:spAutoFit/>
-          </a:bodyPr>
-          <a:lstStyle/>
-          <a:p>
-            <a:pPr algn="l"/>
-            <a:r>
-              <a:rPr sz="750" b="0">
-                <a:solidFill>
-                  <a:srgbClr val="5F6368"/>
-                </a:solidFill>
-                <a:latin typeface="Arial"/>
-              </a:rPr>
-              <a:t>Object access related questions</a:t>
-            </a:r>
-          </a:p>
-        </p:txBody>
-      </p:sp>
-      <p:sp>
-        <p:nvSpPr>
-          <p:cNvPr id="78" name="TextBox 77"/>
-          <p:cNvSpPr txBox="1"/>
-          <p:nvPr/>
-        </p:nvSpPr>
-        <p:spPr>
-          <a:xfrm>
-            <a:off x="164592" y="6116421"/>
-            <a:ext cx="3788664" cy="256489"/>
-          </a:xfrm>
-          <a:prstGeom prst="rect">
-            <a:avLst/>
-          </a:prstGeom>
-          <a:noFill/>
-        </p:spPr>
-        <p:txBody>
-          <a:bodyPr wrap="square">
-            <a:spAutoFit/>
-          </a:bodyPr>
-          <a:lstStyle/>
-          <a:p>
-            <a:pPr algn="l"/>
-            <a:r>
-              <a:rPr sz="900" b="1">
-                <a:solidFill>
-                  <a:srgbClr val="1A1A1A"/>
-                </a:solidFill>
-                <a:latin typeface="Arial"/>
-              </a:rPr>
-              <a:t>RCA (Configurator)  —  5</a:t>
-            </a:r>
-          </a:p>
-        </p:txBody>
-      </p:sp>
-      <p:sp>
-        <p:nvSpPr>
-          <p:cNvPr id="79" name="Rectangle 78"/>
-          <p:cNvSpPr/>
-          <p:nvPr/>
-        </p:nvSpPr>
-        <p:spPr>
-          <a:xfrm>
-            <a:off x="164592" y="6362650"/>
-            <a:ext cx="3715512" cy="54864"/>
-          </a:xfrm>
-          <a:prstGeom prst="rect">
-            <a:avLst/>
-          </a:prstGeom>
-          <a:solidFill>
-            <a:srgbClr val="F1F3F4"/>
-          </a:solidFill>
-          <a:ln>
-            <a:noFill/>
-          </a:ln>
-        </p:spPr>
-        <p:style>
-          <a:lnRef idx="1">
-            <a:schemeClr val="accent1"/>
-          </a:lnRef>
-          <a:fillRef idx="3">
-            <a:schemeClr val="accent1"/>
-          </a:fillRef>
-          <a:effectRef idx="2">
-            <a:schemeClr val="accent1"/>
-          </a:effectRef>
-          <a:fontRef idx="minor">
-            <a:schemeClr val="lt1"/>
-          </a:fontRef>
-        </p:style>
-        <p:txBody>
-          <a:bodyPr rtlCol="0" anchor="ctr"/>
-          <a:lstStyle/>
-          <a:p>
-            <a:pPr algn="ctr"/>
-          </a:p>
-        </p:txBody>
-      </p:sp>
-      <p:sp>
-        <p:nvSpPr>
-          <p:cNvPr id="80" name="Rectangle 79"/>
-          <p:cNvSpPr/>
-          <p:nvPr/>
-        </p:nvSpPr>
-        <p:spPr>
-          <a:xfrm>
-            <a:off x="164592" y="6362650"/>
-            <a:ext cx="807720" cy="54864"/>
-          </a:xfrm>
-          <a:prstGeom prst="rect">
-            <a:avLst/>
-          </a:prstGeom>
-          <a:solidFill>
-            <a:srgbClr val="5F6368"/>
-          </a:solidFill>
-          <a:ln>
-            <a:noFill/>
-          </a:ln>
-        </p:spPr>
-        <p:style>
-          <a:lnRef idx="1">
-            <a:schemeClr val="accent1"/>
-          </a:lnRef>
-          <a:fillRef idx="3">
-            <a:schemeClr val="accent1"/>
-          </a:fillRef>
-          <a:effectRef idx="2">
-            <a:schemeClr val="accent1"/>
-          </a:effectRef>
-          <a:fontRef idx="minor">
-            <a:schemeClr val="lt1"/>
-          </a:fontRef>
-        </p:style>
-        <p:txBody>
-          <a:bodyPr rtlCol="0" anchor="ctr"/>
-          <a:lstStyle/>
-          <a:p>
-            <a:pPr algn="ctr"/>
-          </a:p>
-        </p:txBody>
-      </p:sp>
-      <p:sp>
-        <p:nvSpPr>
-          <p:cNvPr id="81" name="Rectangle 80"/>
-          <p:cNvSpPr/>
-          <p:nvPr/>
-        </p:nvSpPr>
-        <p:spPr>
-          <a:xfrm>
-            <a:off x="4172712" y="3845052"/>
-            <a:ext cx="3843528" cy="182880"/>
-          </a:xfrm>
-          <a:prstGeom prst="rect">
-            <a:avLst/>
-          </a:prstGeom>
-          <a:solidFill>
-            <a:srgbClr val="E6F4EA"/>
-          </a:solidFill>
-          <a:ln>
-            <a:noFill/>
-          </a:ln>
-        </p:spPr>
-        <p:style>
-          <a:lnRef idx="1">
-            <a:schemeClr val="accent1"/>
-          </a:lnRef>
-          <a:fillRef idx="3">
-            <a:schemeClr val="accent1"/>
-          </a:fillRef>
-          <a:effectRef idx="2">
-            <a:schemeClr val="accent1"/>
-          </a:effectRef>
-          <a:fontRef idx="minor">
-            <a:schemeClr val="lt1"/>
-          </a:fontRef>
-        </p:style>
-        <p:txBody>
-          <a:bodyPr rtlCol="0" anchor="ctr"/>
-          <a:lstStyle/>
-          <a:p>
-            <a:pPr algn="ctr"/>
-          </a:p>
-        </p:txBody>
-      </p:sp>
-      <p:sp>
-        <p:nvSpPr>
-          <p:cNvPr id="82" name="TextBox 81"/>
-          <p:cNvSpPr txBox="1"/>
-          <p:nvPr/>
-        </p:nvSpPr>
-        <p:spPr>
-          <a:xfrm>
-            <a:off x="4200144" y="3845052"/>
-            <a:ext cx="3788664" cy="182880"/>
-          </a:xfrm>
-          <a:prstGeom prst="rect">
-            <a:avLst/>
-          </a:prstGeom>
-          <a:noFill/>
-        </p:spPr>
-        <p:txBody>
-          <a:bodyPr wrap="square">
-            <a:spAutoFit/>
-          </a:bodyPr>
-          <a:lstStyle/>
-          <a:p>
-            <a:pPr algn="l"/>
-            <a:r>
-              <a:rPr sz="800" b="1">
-                <a:solidFill>
-                  <a:srgbClr val="137333"/>
-                </a:solidFill>
-                <a:latin typeface="Arial"/>
-              </a:rPr>
-              <a:t>ACCOUNT SIGNALS</a:t>
-            </a:r>
-          </a:p>
-        </p:txBody>
-      </p:sp>
-      <p:sp>
-        <p:nvSpPr>
-          <p:cNvPr id="83" name="Rectangle 82"/>
-          <p:cNvSpPr/>
-          <p:nvPr/>
-        </p:nvSpPr>
-        <p:spPr>
-          <a:xfrm>
-            <a:off x="4200144" y="4064508"/>
-            <a:ext cx="36576" cy="809244"/>
+            <a:off x="0" y="6629400"/>
+            <a:ext cx="12188952" cy="228600"/>
           </a:xfrm>
           <a:prstGeom prst="rect">
             <a:avLst/>
@@ -6362,57 +7884,14 @@
       </p:sp>
       <p:sp>
         <p:nvSpPr>
-          <p:cNvPr id="84" name="Rectangle 83"/>
-          <p:cNvSpPr/>
-          <p:nvPr/>
-        </p:nvSpPr>
-        <p:spPr>
-          <a:xfrm>
-            <a:off x="4245864" y="4064508"/>
-            <a:ext cx="3715511" cy="809244"/>
-          </a:xfrm>
-          <a:prstGeom prst="rect">
-            <a:avLst/>
-          </a:prstGeom>
-          <a:solidFill>
-            <a:srgbClr val="E6F4EA"/>
-          </a:solidFill>
-          <a:ln>
-            <a:noFill/>
-          </a:ln>
-        </p:spPr>
-        <p:style>
-          <a:lnRef idx="1">
-            <a:schemeClr val="accent1"/>
-          </a:lnRef>
-          <a:fillRef idx="3">
-            <a:schemeClr val="accent1"/>
-          </a:fillRef>
-          <a:effectRef idx="2">
-            <a:schemeClr val="accent1"/>
-          </a:effectRef>
-          <a:fontRef idx="minor">
-            <a:schemeClr val="lt1"/>
-          </a:fontRef>
-        </p:style>
-        <p:txBody>
-          <a:bodyPr rtlCol="0" anchor="ctr"/>
-          <a:lstStyle/>
-          <a:p>
-            <a:pPr algn="ctr"/>
-          </a:p>
-        </p:txBody>
-      </p:sp>
-      <p:sp>
-        <p:nvSpPr>
-          <p:cNvPr id="85" name="TextBox 84"/>
+          <p:cNvPr id="119" name="TextBox 118"/>
           <p:cNvSpPr txBox="1"/>
           <p:nvPr/>
         </p:nvSpPr>
         <p:spPr>
           <a:xfrm>
-            <a:off x="4282440" y="4091940"/>
-            <a:ext cx="3642359" cy="164592"/>
+            <a:off x="182880" y="6665976"/>
+            <a:ext cx="4389120" cy="164592"/>
           </a:xfrm>
           <a:prstGeom prst="rect">
             <a:avLst/>
@@ -6427,27 +7906,27 @@
           <a:p>
             <a:pPr algn="l"/>
             <a:r>
-              <a:rPr sz="900" b="1">
-                <a:solidFill>
-                  <a:srgbClr val="137333"/>
+              <a:rPr sz="800" b="0">
+                <a:solidFill>
+                  <a:srgbClr val="FFFFFF"/>
                 </a:solidFill>
                 <a:latin typeface="Arial"/>
               </a:rPr>
-              <a:t>Claro</a:t>
-            </a:r>
-          </a:p>
-        </p:txBody>
-      </p:sp>
-      <p:sp>
-        <p:nvSpPr>
-          <p:cNvPr id="86" name="TextBox 85"/>
+              <a:t>Chaten's Team  |  Signature &amp; Premier  |  Industry Cloud</a:t>
+            </a:r>
+          </a:p>
+        </p:txBody>
+      </p:sp>
+      <p:sp>
+        <p:nvSpPr>
+          <p:cNvPr id="120" name="TextBox 119"/>
           <p:cNvSpPr txBox="1"/>
           <p:nvPr/>
         </p:nvSpPr>
         <p:spPr>
           <a:xfrm>
-            <a:off x="4282440" y="4247388"/>
-            <a:ext cx="3642359" cy="617220"/>
+            <a:off x="3931920" y="6665976"/>
+            <a:ext cx="5486400" cy="164592"/>
           </a:xfrm>
           <a:prstGeom prst="rect">
             <a:avLst/>
@@ -6460,667 +7939,29 @@
           </a:bodyPr>
           <a:lstStyle/>
           <a:p>
-            <a:pPr algn="l"/>
-            <a:r>
-              <a:rPr sz="850" b="0">
-                <a:solidFill>
-                  <a:srgbClr val="3C4043"/>
+            <a:pPr algn="ctr"/>
+            <a:r>
+              <a:rPr sz="800" b="0">
+                <a:solidFill>
+                  <a:srgbClr val="FFFFFF"/>
                 </a:solidFill>
                 <a:latin typeface="Arial"/>
               </a:rPr>
-              <a:t>Recommendations shared with PS team — customer will be onboarded on improvements. CSM follow-up on Slack pending; case to close post-confirmation.</a:t>
-            </a:r>
-          </a:p>
-        </p:txBody>
-      </p:sp>
-      <p:sp>
-        <p:nvSpPr>
-          <p:cNvPr id="87" name="Rectangle 86"/>
-          <p:cNvSpPr/>
-          <p:nvPr/>
-        </p:nvSpPr>
-        <p:spPr>
-          <a:xfrm>
-            <a:off x="4200144" y="4919472"/>
-            <a:ext cx="36576" cy="809244"/>
-          </a:xfrm>
-          <a:prstGeom prst="rect">
-            <a:avLst/>
-          </a:prstGeom>
-          <a:solidFill>
-            <a:srgbClr val="B06000"/>
-          </a:solidFill>
-          <a:ln>
-            <a:noFill/>
-          </a:ln>
-        </p:spPr>
-        <p:style>
-          <a:lnRef idx="1">
-            <a:schemeClr val="accent1"/>
-          </a:lnRef>
-          <a:fillRef idx="3">
-            <a:schemeClr val="accent1"/>
-          </a:fillRef>
-          <a:effectRef idx="2">
-            <a:schemeClr val="accent1"/>
-          </a:effectRef>
-          <a:fontRef idx="minor">
-            <a:schemeClr val="lt1"/>
-          </a:fontRef>
-        </p:style>
-        <p:txBody>
-          <a:bodyPr rtlCol="0" anchor="ctr"/>
-          <a:lstStyle/>
-          <a:p>
-            <a:pPr algn="ctr"/>
-          </a:p>
-        </p:txBody>
-      </p:sp>
-      <p:sp>
-        <p:nvSpPr>
-          <p:cNvPr id="88" name="Rectangle 87"/>
-          <p:cNvSpPr/>
-          <p:nvPr/>
-        </p:nvSpPr>
-        <p:spPr>
-          <a:xfrm>
-            <a:off x="4245864" y="4919472"/>
-            <a:ext cx="3715511" cy="809244"/>
-          </a:xfrm>
-          <a:prstGeom prst="rect">
-            <a:avLst/>
-          </a:prstGeom>
-          <a:solidFill>
-            <a:srgbClr val="FEF7E0"/>
-          </a:solidFill>
-          <a:ln>
-            <a:noFill/>
-          </a:ln>
-        </p:spPr>
-        <p:style>
-          <a:lnRef idx="1">
-            <a:schemeClr val="accent1"/>
-          </a:lnRef>
-          <a:fillRef idx="3">
-            <a:schemeClr val="accent1"/>
-          </a:fillRef>
-          <a:effectRef idx="2">
-            <a:schemeClr val="accent1"/>
-          </a:effectRef>
-          <a:fontRef idx="minor">
-            <a:schemeClr val="lt1"/>
-          </a:fontRef>
-        </p:style>
-        <p:txBody>
-          <a:bodyPr rtlCol="0" anchor="ctr"/>
-          <a:lstStyle/>
-          <a:p>
-            <a:pPr algn="ctr"/>
-          </a:p>
-        </p:txBody>
-      </p:sp>
-      <p:sp>
-        <p:nvSpPr>
-          <p:cNvPr id="89" name="TextBox 88"/>
+              <a:t>CSAT 5.0 All Tiers  |  Prod 119%/109%  |  Esc 0%  |  SLA 0%  |  TTR 8.11 / SIG 8.38</a:t>
+            </a:r>
+          </a:p>
+        </p:txBody>
+      </p:sp>
+      <p:sp>
+        <p:nvSpPr>
+          <p:cNvPr id="121" name="TextBox 120"/>
           <p:cNvSpPr txBox="1"/>
           <p:nvPr/>
         </p:nvSpPr>
         <p:spPr>
           <a:xfrm>
-            <a:off x="4282440" y="4946904"/>
-            <a:ext cx="3642359" cy="164592"/>
-          </a:xfrm>
-          <a:prstGeom prst="rect">
-            <a:avLst/>
-          </a:prstGeom>
-          <a:noFill/>
-        </p:spPr>
-        <p:txBody>
-          <a:bodyPr wrap="square">
-            <a:spAutoFit/>
-          </a:bodyPr>
-          <a:lstStyle/>
-          <a:p>
-            <a:pPr algn="l"/>
-            <a:r>
-              <a:rPr sz="900" b="1">
-                <a:solidFill>
-                  <a:srgbClr val="B06000"/>
-                </a:solidFill>
-                <a:latin typeface="Arial"/>
-              </a:rPr>
-              <a:t>Veeam  🔴 Running Hot</a:t>
-            </a:r>
-          </a:p>
-        </p:txBody>
-      </p:sp>
-      <p:sp>
-        <p:nvSpPr>
-          <p:cNvPr id="90" name="TextBox 89"/>
-          <p:cNvSpPr txBox="1"/>
-          <p:nvPr/>
-        </p:nvSpPr>
-        <p:spPr>
-          <a:xfrm>
-            <a:off x="4282440" y="5102352"/>
-            <a:ext cx="3642359" cy="617220"/>
-          </a:xfrm>
-          <a:prstGeom prst="rect">
-            <a:avLst/>
-          </a:prstGeom>
-          <a:noFill/>
-        </p:spPr>
-        <p:txBody>
-          <a:bodyPr wrap="square">
-            <a:spAutoFit/>
-          </a:bodyPr>
-          <a:lstStyle/>
-          <a:p>
-            <a:pPr algn="l"/>
-            <a:r>
-              <a:rPr sz="850" b="0">
-                <a:solidFill>
-                  <a:srgbClr val="3C4043"/>
-                </a:solidFill>
-                <a:latin typeface="Arial"/>
-              </a:rPr>
-              <a:t>Meeting scheduled for transactional issues. Multiple implementation blockers. RCA SA engaged.</a:t>
-            </a:r>
-          </a:p>
-        </p:txBody>
-      </p:sp>
-      <p:sp>
-        <p:nvSpPr>
-          <p:cNvPr id="91" name="Rectangle 90"/>
-          <p:cNvSpPr/>
-          <p:nvPr/>
-        </p:nvSpPr>
-        <p:spPr>
-          <a:xfrm>
-            <a:off x="4200144" y="5774436"/>
-            <a:ext cx="36576" cy="809244"/>
-          </a:xfrm>
-          <a:prstGeom prst="rect">
-            <a:avLst/>
-          </a:prstGeom>
-          <a:solidFill>
-            <a:srgbClr val="1A73E8"/>
-          </a:solidFill>
-          <a:ln>
-            <a:noFill/>
-          </a:ln>
-        </p:spPr>
-        <p:style>
-          <a:lnRef idx="1">
-            <a:schemeClr val="accent1"/>
-          </a:lnRef>
-          <a:fillRef idx="3">
-            <a:schemeClr val="accent1"/>
-          </a:fillRef>
-          <a:effectRef idx="2">
-            <a:schemeClr val="accent1"/>
-          </a:effectRef>
-          <a:fontRef idx="minor">
-            <a:schemeClr val="lt1"/>
-          </a:fontRef>
-        </p:style>
-        <p:txBody>
-          <a:bodyPr rtlCol="0" anchor="ctr"/>
-          <a:lstStyle/>
-          <a:p>
-            <a:pPr algn="ctr"/>
-          </a:p>
-        </p:txBody>
-      </p:sp>
-      <p:sp>
-        <p:nvSpPr>
-          <p:cNvPr id="92" name="Rectangle 91"/>
-          <p:cNvSpPr/>
-          <p:nvPr/>
-        </p:nvSpPr>
-        <p:spPr>
-          <a:xfrm>
-            <a:off x="4245864" y="5774436"/>
-            <a:ext cx="3715511" cy="809244"/>
-          </a:xfrm>
-          <a:prstGeom prst="rect">
-            <a:avLst/>
-          </a:prstGeom>
-          <a:solidFill>
-            <a:srgbClr val="E8F0FE"/>
-          </a:solidFill>
-          <a:ln>
-            <a:noFill/>
-          </a:ln>
-        </p:spPr>
-        <p:style>
-          <a:lnRef idx="1">
-            <a:schemeClr val="accent1"/>
-          </a:lnRef>
-          <a:fillRef idx="3">
-            <a:schemeClr val="accent1"/>
-          </a:fillRef>
-          <a:effectRef idx="2">
-            <a:schemeClr val="accent1"/>
-          </a:effectRef>
-          <a:fontRef idx="minor">
-            <a:schemeClr val="lt1"/>
-          </a:fontRef>
-        </p:style>
-        <p:txBody>
-          <a:bodyPr rtlCol="0" anchor="ctr"/>
-          <a:lstStyle/>
-          <a:p>
-            <a:pPr algn="ctr"/>
-          </a:p>
-        </p:txBody>
-      </p:sp>
-      <p:sp>
-        <p:nvSpPr>
-          <p:cNvPr id="93" name="TextBox 92"/>
-          <p:cNvSpPr txBox="1"/>
-          <p:nvPr/>
-        </p:nvSpPr>
-        <p:spPr>
-          <a:xfrm>
-            <a:off x="4282440" y="5801868"/>
-            <a:ext cx="3642359" cy="164592"/>
-          </a:xfrm>
-          <a:prstGeom prst="rect">
-            <a:avLst/>
-          </a:prstGeom>
-          <a:noFill/>
-        </p:spPr>
-        <p:txBody>
-          <a:bodyPr wrap="square">
-            <a:spAutoFit/>
-          </a:bodyPr>
-          <a:lstStyle/>
-          <a:p>
-            <a:pPr algn="l"/>
-            <a:r>
-              <a:rPr sz="900" b="1">
-                <a:solidFill>
-                  <a:srgbClr val="1A73E8"/>
-                </a:solidFill>
-                <a:latin typeface="Arial"/>
-              </a:rPr>
-              <a:t>Pfizer</a:t>
-            </a:r>
-          </a:p>
-        </p:txBody>
-      </p:sp>
-      <p:sp>
-        <p:nvSpPr>
-          <p:cNvPr id="94" name="TextBox 93"/>
-          <p:cNvSpPr txBox="1"/>
-          <p:nvPr/>
-        </p:nvSpPr>
-        <p:spPr>
-          <a:xfrm>
-            <a:off x="4282440" y="5957316"/>
-            <a:ext cx="3642359" cy="617220"/>
-          </a:xfrm>
-          <a:prstGeom prst="rect">
-            <a:avLst/>
-          </a:prstGeom>
-          <a:noFill/>
-        </p:spPr>
-        <p:txBody>
-          <a:bodyPr wrap="square">
-            <a:spAutoFit/>
-          </a:bodyPr>
-          <a:lstStyle/>
-          <a:p>
-            <a:pPr algn="l"/>
-            <a:r>
-              <a:rPr sz="850" b="0">
-                <a:solidFill>
-                  <a:srgbClr val="3C4043"/>
-                </a:solidFill>
-                <a:latin typeface="Arial"/>
-              </a:rPr>
-              <a:t>Event monitoring cases open — alignment with Harish Raja needed. Follow-up call tomorrow (@tushar coordinating).</a:t>
-            </a:r>
-          </a:p>
-        </p:txBody>
-      </p:sp>
-      <p:sp>
-        <p:nvSpPr>
-          <p:cNvPr id="95" name="Rectangle 94"/>
-          <p:cNvSpPr/>
-          <p:nvPr/>
-        </p:nvSpPr>
-        <p:spPr>
-          <a:xfrm>
-            <a:off x="8235695" y="3845052"/>
-            <a:ext cx="3843528" cy="182880"/>
-          </a:xfrm>
-          <a:prstGeom prst="rect">
-            <a:avLst/>
-          </a:prstGeom>
-          <a:solidFill>
-            <a:srgbClr val="E6F4EA"/>
-          </a:solidFill>
-          <a:ln>
-            <a:noFill/>
-          </a:ln>
-        </p:spPr>
-        <p:style>
-          <a:lnRef idx="1">
-            <a:schemeClr val="accent1"/>
-          </a:lnRef>
-          <a:fillRef idx="3">
-            <a:schemeClr val="accent1"/>
-          </a:fillRef>
-          <a:effectRef idx="2">
-            <a:schemeClr val="accent1"/>
-          </a:effectRef>
-          <a:fontRef idx="minor">
-            <a:schemeClr val="lt1"/>
-          </a:fontRef>
-        </p:style>
-        <p:txBody>
-          <a:bodyPr rtlCol="0" anchor="ctr"/>
-          <a:lstStyle/>
-          <a:p>
-            <a:pPr algn="ctr"/>
-          </a:p>
-        </p:txBody>
-      </p:sp>
-      <p:sp>
-        <p:nvSpPr>
-          <p:cNvPr id="96" name="TextBox 95"/>
-          <p:cNvSpPr txBox="1"/>
-          <p:nvPr/>
-        </p:nvSpPr>
-        <p:spPr>
-          <a:xfrm>
-            <a:off x="8263128" y="3845052"/>
-            <a:ext cx="3788664" cy="182880"/>
-          </a:xfrm>
-          <a:prstGeom prst="rect">
-            <a:avLst/>
-          </a:prstGeom>
-          <a:noFill/>
-        </p:spPr>
-        <p:txBody>
-          <a:bodyPr wrap="square">
-            <a:spAutoFit/>
-          </a:bodyPr>
-          <a:lstStyle/>
-          <a:p>
-            <a:pPr algn="l"/>
-            <a:r>
-              <a:rPr sz="800" b="1">
-                <a:solidFill>
-                  <a:srgbClr val="137333"/>
-                </a:solidFill>
-                <a:latin typeface="Arial"/>
-              </a:rPr>
-              <a:t>POSITIVES &amp; HIGHLIGHTS</a:t>
-            </a:r>
-          </a:p>
-        </p:txBody>
-      </p:sp>
-      <p:sp>
-        <p:nvSpPr>
-          <p:cNvPr id="97" name="TextBox 96"/>
-          <p:cNvSpPr txBox="1"/>
-          <p:nvPr/>
-        </p:nvSpPr>
-        <p:spPr>
-          <a:xfrm>
-            <a:off x="8290560" y="4064508"/>
-            <a:ext cx="3788664" cy="2510028"/>
-          </a:xfrm>
-          <a:prstGeom prst="rect">
-            <a:avLst/>
-          </a:prstGeom>
-          <a:noFill/>
-        </p:spPr>
-        <p:txBody>
-          <a:bodyPr wrap="square">
-            <a:spAutoFit/>
-          </a:bodyPr>
-          <a:lstStyle/>
-          <a:p>
-            <a:pPr>
-              <a:spcBef>
-                <a:spcPts val="100"/>
-              </a:spcBef>
-            </a:pPr>
-            <a:r>
-              <a:rPr sz="950" b="1">
-                <a:solidFill>
-                  <a:srgbClr val="0B5225"/>
-                </a:solidFill>
-                <a:latin typeface="Arial"/>
-              </a:rPr>
-              <a:t>✓  No escalations from the team</a:t>
-            </a:r>
-          </a:p>
-          <a:p>
-            <a:pPr>
-              <a:spcBef>
-                <a:spcPts val="100"/>
-              </a:spcBef>
-            </a:pPr>
-            <a:r>
-              <a:rPr sz="950" b="1">
-                <a:solidFill>
-                  <a:srgbClr val="0B5225"/>
-                </a:solidFill>
-                <a:latin typeface="Arial"/>
-              </a:rPr>
-              <a:t>✓  19 Premier cases picked up during low SIG inflow</a:t>
-            </a:r>
-          </a:p>
-          <a:p>
-            <a:pPr>
-              <a:spcBef>
-                <a:spcPts val="100"/>
-              </a:spcBef>
-            </a:pPr>
-            <a:r>
-              <a:rPr sz="850" b="0">
-                <a:solidFill>
-                  <a:srgbClr val="0B5225"/>
-                </a:solidFill>
-                <a:latin typeface="Arial"/>
-              </a:rPr>
-              <a:t>     Proactive capacity utilisation</a:t>
-            </a:r>
-          </a:p>
-          <a:p>
-            <a:pPr>
-              <a:spcBef>
-                <a:spcPts val="100"/>
-              </a:spcBef>
-            </a:pPr>
-            <a:r>
-              <a:rPr sz="950" b="1">
-                <a:solidFill>
-                  <a:srgbClr val="0B5225"/>
-                </a:solidFill>
-                <a:latin typeface="Arial"/>
-              </a:rPr>
-              <a:t>✓  11 Sales Security cases picked up additionally</a:t>
-            </a:r>
-          </a:p>
-          <a:p>
-            <a:pPr>
-              <a:spcBef>
-                <a:spcPts val="100"/>
-              </a:spcBef>
-            </a:pPr>
-            <a:r>
-              <a:rPr sz="850" b="0">
-                <a:solidFill>
-                  <a:srgbClr val="0B5225"/>
-                </a:solidFill>
-                <a:latin typeface="Arial"/>
-              </a:rPr>
-              <a:t>✓  Aniruddha: 8 Marketing Cloud (3 Premier + 6 Standard)</a:t>
-            </a:r>
-          </a:p>
-          <a:p>
-            <a:pPr>
-              <a:spcBef>
-                <a:spcPts val="100"/>
-              </a:spcBef>
-            </a:pPr>
-            <a:r>
-              <a:rPr sz="950" b="1">
-                <a:solidFill>
-                  <a:srgbClr val="0B5225"/>
-                </a:solidFill>
-                <a:latin typeface="Arial"/>
-              </a:rPr>
-              <a:t>✓  Closure = Capacity (88/88) — queue fully cleared</a:t>
-            </a:r>
-          </a:p>
-          <a:p>
-            <a:pPr>
-              <a:spcBef>
-                <a:spcPts val="100"/>
-              </a:spcBef>
-            </a:pPr>
-            <a:r>
-              <a:rPr sz="950" b="1">
-                <a:solidFill>
-                  <a:srgbClr val="0B5225"/>
-                </a:solidFill>
-                <a:latin typeface="Arial"/>
-              </a:rPr>
-              <a:t>✓  119% overall productivity — team above target</a:t>
-            </a:r>
-          </a:p>
-        </p:txBody>
-      </p:sp>
-      <p:sp>
-        <p:nvSpPr>
-          <p:cNvPr id="98" name="Rectangle 97"/>
-          <p:cNvSpPr/>
-          <p:nvPr/>
-        </p:nvSpPr>
-        <p:spPr>
-          <a:xfrm>
-            <a:off x="0" y="6629400"/>
-            <a:ext cx="12188952" cy="228600"/>
-          </a:xfrm>
-          <a:prstGeom prst="rect">
-            <a:avLst/>
-          </a:prstGeom>
-          <a:solidFill>
-            <a:srgbClr val="137333"/>
-          </a:solidFill>
-          <a:ln>
-            <a:noFill/>
-          </a:ln>
-        </p:spPr>
-        <p:style>
-          <a:lnRef idx="1">
-            <a:schemeClr val="accent1"/>
-          </a:lnRef>
-          <a:fillRef idx="3">
-            <a:schemeClr val="accent1"/>
-          </a:fillRef>
-          <a:effectRef idx="2">
-            <a:schemeClr val="accent1"/>
-          </a:effectRef>
-          <a:fontRef idx="minor">
-            <a:schemeClr val="lt1"/>
-          </a:fontRef>
-        </p:style>
-        <p:txBody>
-          <a:bodyPr rtlCol="0" anchor="ctr"/>
-          <a:lstStyle/>
-          <a:p>
-            <a:pPr algn="ctr"/>
-          </a:p>
-        </p:txBody>
-      </p:sp>
-      <p:sp>
-        <p:nvSpPr>
-          <p:cNvPr id="99" name="TextBox 98"/>
-          <p:cNvSpPr txBox="1"/>
-          <p:nvPr/>
-        </p:nvSpPr>
-        <p:spPr>
-          <a:xfrm>
-            <a:off x="182880" y="6656832"/>
-            <a:ext cx="4114800" cy="192024"/>
-          </a:xfrm>
-          <a:prstGeom prst="rect">
-            <a:avLst/>
-          </a:prstGeom>
-          <a:noFill/>
-        </p:spPr>
-        <p:txBody>
-          <a:bodyPr wrap="square">
-            <a:spAutoFit/>
-          </a:bodyPr>
-          <a:lstStyle/>
-          <a:p>
-            <a:pPr algn="l"/>
-            <a:r>
-              <a:rPr sz="800" b="0">
-                <a:solidFill>
-                  <a:srgbClr val="FFFFFF"/>
-                </a:solidFill>
-                <a:latin typeface="Arial"/>
-              </a:rPr>
-              <a:t>Chaten's Team  |  Signature &amp; Premier Support  |  Industry Cloud</a:t>
-            </a:r>
-          </a:p>
-        </p:txBody>
-      </p:sp>
-      <p:sp>
-        <p:nvSpPr>
-          <p:cNvPr id="100" name="TextBox 99"/>
-          <p:cNvSpPr txBox="1"/>
-          <p:nvPr/>
-        </p:nvSpPr>
-        <p:spPr>
-          <a:xfrm>
-            <a:off x="3657600" y="6656832"/>
-            <a:ext cx="5303520" cy="192024"/>
-          </a:xfrm>
-          <a:prstGeom prst="rect">
-            <a:avLst/>
-          </a:prstGeom>
-          <a:noFill/>
-        </p:spPr>
-        <p:txBody>
-          <a:bodyPr wrap="square">
-            <a:spAutoFit/>
-          </a:bodyPr>
-          <a:lstStyle/>
-          <a:p>
-            <a:pPr algn="ctr"/>
-            <a:r>
-              <a:rPr sz="800" b="0">
-                <a:solidFill>
-                  <a:srgbClr val="FFFFFF"/>
-                </a:solidFill>
-                <a:latin typeface="Arial"/>
-              </a:rPr>
-              <a:t>CSAT: 5.0 All Tiers  |  Prod: 119% Overall / 109% Closure  |  Esc: 0%  |  SLA Miss: 0%</a:t>
-            </a:r>
-          </a:p>
-        </p:txBody>
-      </p:sp>
-      <p:sp>
-        <p:nvSpPr>
-          <p:cNvPr id="101" name="TextBox 100"/>
-          <p:cNvSpPr txBox="1"/>
-          <p:nvPr/>
-        </p:nvSpPr>
-        <p:spPr>
-          <a:xfrm>
-            <a:off x="9692640" y="6656832"/>
-            <a:ext cx="2377440" cy="192024"/>
+            <a:off x="9994392" y="6665976"/>
+            <a:ext cx="2011680" cy="164592"/>
           </a:xfrm>
           <a:prstGeom prst="rect">
             <a:avLst/>
